--- a/output/fambox/friday-presentation-2026-05-30-final.pptx
+++ b/output/fambox/friday-presentation-2026-05-30-final.pptx
@@ -4,21 +4,24 @@
   <p:sldMasterIdLst>
     <p:sldMasterId id="2147483648" r:id="rId1"/>
   </p:sldMasterIdLst>
+  <p:notesMasterIdLst>
+    <p:notesMasterId r:id="rId14"/>
+  </p:notesMasterIdLst>
   <p:sldIdLst>
-    <p:sldId id="256" r:id="rId7"/>
-    <p:sldId id="257" r:id="rId8"/>
-    <p:sldId id="258" r:id="rId9"/>
-    <p:sldId id="259" r:id="rId10"/>
-    <p:sldId id="260" r:id="rId11"/>
-    <p:sldId id="261" r:id="rId12"/>
-    <p:sldId id="262" r:id="rId13"/>
-    <p:sldId id="263" r:id="rId14"/>
-    <p:sldId id="264" r:id="rId15"/>
-    <p:sldId id="265" r:id="rId16"/>
-    <p:sldId id="266" r:id="rId17"/>
-    <p:sldId id="267" r:id="rId18"/>
+    <p:sldId id="256" r:id="rId2"/>
+    <p:sldId id="257" r:id="rId3"/>
+    <p:sldId id="258" r:id="rId4"/>
+    <p:sldId id="259" r:id="rId5"/>
+    <p:sldId id="260" r:id="rId6"/>
+    <p:sldId id="261" r:id="rId7"/>
+    <p:sldId id="262" r:id="rId8"/>
+    <p:sldId id="263" r:id="rId9"/>
+    <p:sldId id="264" r:id="rId10"/>
+    <p:sldId id="265" r:id="rId11"/>
+    <p:sldId id="266" r:id="rId12"/>
+    <p:sldId id="267" r:id="rId13"/>
   </p:sldIdLst>
-  <p:sldSz cx="12191695" cy="6858000" type="screen4x3"/>
+  <p:sldSz cx="12192000" cy="6858000"/>
   <p:notesSz cx="6858000" cy="9144000"/>
   <p:defaultTextStyle>
     <a:defPPr>
@@ -115,7 +118,1015 @@
       </a:defRPr>
     </a:lvl9pPr>
   </p:defaultTextStyle>
+  <p:extLst>
+    <p:ext uri="{EFAFB233-063F-42B5-8137-9DF3F51BA10A}">
+      <p15:sldGuideLst xmlns:p15="http://schemas.microsoft.com/office/powerpoint/2012/main">
+        <p15:guide id="1" orient="horz" pos="2160">
+          <p15:clr>
+            <a:srgbClr val="A4A3A4"/>
+          </p15:clr>
+        </p15:guide>
+        <p15:guide id="2" pos="2880">
+          <p15:clr>
+            <a:srgbClr val="A4A3A4"/>
+          </p15:clr>
+        </p15:guide>
+      </p15:sldGuideLst>
+    </p:ext>
+  </p:extLst>
 </p:presentation>
+</file>
+
+<file path=ppt/notesMasters/notesMaster1.xml><?xml version="1.0" encoding="utf-8"?>
+<p:notesMaster xmlns:a="http://schemas.openxmlformats.org/drawingml/2006/main" xmlns:r="http://schemas.openxmlformats.org/officeDocument/2006/relationships" xmlns:p="http://schemas.openxmlformats.org/presentationml/2006/main">
+  <p:cSld>
+    <p:bg>
+      <p:bgRef idx="1001">
+        <a:schemeClr val="bg1"/>
+      </p:bgRef>
+    </p:bg>
+    <p:spTree>
+      <p:nvGrpSpPr>
+        <p:cNvPr id="1" name=""/>
+        <p:cNvGrpSpPr/>
+        <p:nvPr/>
+      </p:nvGrpSpPr>
+      <p:grpSpPr>
+        <a:xfrm>
+          <a:off x="0" y="0"/>
+          <a:ext cx="0" cy="0"/>
+          <a:chOff x="0" y="0"/>
+          <a:chExt cx="0" cy="0"/>
+        </a:xfrm>
+      </p:grpSpPr>
+      <p:sp>
+        <p:nvSpPr>
+          <p:cNvPr id="2" name="ヘッダー プレースホルダー 1"/>
+          <p:cNvSpPr>
+            <a:spLocks noGrp="1"/>
+          </p:cNvSpPr>
+          <p:nvPr>
+            <p:ph type="hdr" sz="quarter"/>
+          </p:nvPr>
+        </p:nvSpPr>
+        <p:spPr>
+          <a:xfrm>
+            <a:off x="0" y="0"/>
+            <a:ext cx="2971800" cy="458788"/>
+          </a:xfrm>
+          <a:prstGeom prst="rect">
+            <a:avLst/>
+          </a:prstGeom>
+        </p:spPr>
+        <p:txBody>
+          <a:bodyPr vert="horz" lIns="91440" tIns="45720" rIns="91440" bIns="45720" rtlCol="0"/>
+          <a:lstStyle>
+            <a:lvl1pPr algn="l">
+              <a:defRPr sz="1200"/>
+            </a:lvl1pPr>
+          </a:lstStyle>
+          <a:p>
+            <a:endParaRPr kumimoji="1" lang="ja-JP" altLang="en-US"/>
+          </a:p>
+        </p:txBody>
+      </p:sp>
+      <p:sp>
+        <p:nvSpPr>
+          <p:cNvPr id="3" name="日付プレースホルダー 2"/>
+          <p:cNvSpPr>
+            <a:spLocks noGrp="1"/>
+          </p:cNvSpPr>
+          <p:nvPr>
+            <p:ph type="dt" idx="1"/>
+          </p:nvPr>
+        </p:nvSpPr>
+        <p:spPr>
+          <a:xfrm>
+            <a:off x="3884613" y="0"/>
+            <a:ext cx="2971800" cy="458788"/>
+          </a:xfrm>
+          <a:prstGeom prst="rect">
+            <a:avLst/>
+          </a:prstGeom>
+        </p:spPr>
+        <p:txBody>
+          <a:bodyPr vert="horz" lIns="91440" tIns="45720" rIns="91440" bIns="45720" rtlCol="0"/>
+          <a:lstStyle>
+            <a:lvl1pPr algn="r">
+              <a:defRPr sz="1200"/>
+            </a:lvl1pPr>
+          </a:lstStyle>
+          <a:p>
+            <a:fld id="{C148CE9E-3967-4C43-A888-B316F7732004}" type="datetimeFigureOut">
+              <a:rPr kumimoji="1" lang="ja-JP" altLang="en-US" smtClean="0"/>
+              <a:t>2026/6/2</a:t>
+            </a:fld>
+            <a:endParaRPr kumimoji="1" lang="ja-JP" altLang="en-US"/>
+          </a:p>
+        </p:txBody>
+      </p:sp>
+      <p:sp>
+        <p:nvSpPr>
+          <p:cNvPr id="4" name="スライド イメージ プレースホルダー 3"/>
+          <p:cNvSpPr>
+            <a:spLocks noGrp="1" noRot="1" noChangeAspect="1"/>
+          </p:cNvSpPr>
+          <p:nvPr>
+            <p:ph type="sldImg" idx="2"/>
+          </p:nvPr>
+        </p:nvSpPr>
+        <p:spPr>
+          <a:xfrm>
+            <a:off x="685800" y="1143000"/>
+            <a:ext cx="5486400" cy="3086100"/>
+          </a:xfrm>
+          <a:prstGeom prst="rect">
+            <a:avLst/>
+          </a:prstGeom>
+          <a:noFill/>
+          <a:ln w="12700">
+            <a:solidFill>
+              <a:prstClr val="black"/>
+            </a:solidFill>
+          </a:ln>
+        </p:spPr>
+        <p:txBody>
+          <a:bodyPr vert="horz" lIns="91440" tIns="45720" rIns="91440" bIns="45720" rtlCol="0" anchor="ctr"/>
+          <a:lstStyle/>
+          <a:p>
+            <a:endParaRPr lang="ja-JP" altLang="en-US"/>
+          </a:p>
+        </p:txBody>
+      </p:sp>
+      <p:sp>
+        <p:nvSpPr>
+          <p:cNvPr id="5" name="ノート プレースホルダー 4"/>
+          <p:cNvSpPr>
+            <a:spLocks noGrp="1"/>
+          </p:cNvSpPr>
+          <p:nvPr>
+            <p:ph type="body" sz="quarter" idx="3"/>
+          </p:nvPr>
+        </p:nvSpPr>
+        <p:spPr>
+          <a:xfrm>
+            <a:off x="685800" y="4400550"/>
+            <a:ext cx="5486400" cy="3600450"/>
+          </a:xfrm>
+          <a:prstGeom prst="rect">
+            <a:avLst/>
+          </a:prstGeom>
+        </p:spPr>
+        <p:txBody>
+          <a:bodyPr vert="horz" lIns="91440" tIns="45720" rIns="91440" bIns="45720" rtlCol="0"/>
+          <a:lstStyle/>
+          <a:p>
+            <a:pPr lvl="0"/>
+            <a:r>
+              <a:rPr kumimoji="1" lang="ja-JP" altLang="en-US"/>
+              <a:t>マスター テキストの書式設定</a:t>
+            </a:r>
+          </a:p>
+          <a:p>
+            <a:pPr lvl="1"/>
+            <a:r>
+              <a:rPr kumimoji="1" lang="ja-JP" altLang="en-US"/>
+              <a:t>第 </a:t>
+            </a:r>
+            <a:r>
+              <a:rPr kumimoji="1" lang="en-US" altLang="ja-JP"/>
+              <a:t>2 </a:t>
+            </a:r>
+            <a:r>
+              <a:rPr kumimoji="1" lang="ja-JP" altLang="en-US"/>
+              <a:t>レベル</a:t>
+            </a:r>
+          </a:p>
+          <a:p>
+            <a:pPr lvl="2"/>
+            <a:r>
+              <a:rPr kumimoji="1" lang="ja-JP" altLang="en-US"/>
+              <a:t>第 </a:t>
+            </a:r>
+            <a:r>
+              <a:rPr kumimoji="1" lang="en-US" altLang="ja-JP"/>
+              <a:t>3 </a:t>
+            </a:r>
+            <a:r>
+              <a:rPr kumimoji="1" lang="ja-JP" altLang="en-US"/>
+              <a:t>レベル</a:t>
+            </a:r>
+          </a:p>
+          <a:p>
+            <a:pPr lvl="3"/>
+            <a:r>
+              <a:rPr kumimoji="1" lang="ja-JP" altLang="en-US"/>
+              <a:t>第 </a:t>
+            </a:r>
+            <a:r>
+              <a:rPr kumimoji="1" lang="en-US" altLang="ja-JP"/>
+              <a:t>4 </a:t>
+            </a:r>
+            <a:r>
+              <a:rPr kumimoji="1" lang="ja-JP" altLang="en-US"/>
+              <a:t>レベル</a:t>
+            </a:r>
+          </a:p>
+          <a:p>
+            <a:pPr lvl="4"/>
+            <a:r>
+              <a:rPr kumimoji="1" lang="ja-JP" altLang="en-US"/>
+              <a:t>第 </a:t>
+            </a:r>
+            <a:r>
+              <a:rPr kumimoji="1" lang="en-US" altLang="ja-JP"/>
+              <a:t>5 </a:t>
+            </a:r>
+            <a:r>
+              <a:rPr kumimoji="1" lang="ja-JP" altLang="en-US"/>
+              <a:t>レベル</a:t>
+            </a:r>
+          </a:p>
+        </p:txBody>
+      </p:sp>
+      <p:sp>
+        <p:nvSpPr>
+          <p:cNvPr id="6" name="フッター プレースホルダー 5"/>
+          <p:cNvSpPr>
+            <a:spLocks noGrp="1"/>
+          </p:cNvSpPr>
+          <p:nvPr>
+            <p:ph type="ftr" sz="quarter" idx="4"/>
+          </p:nvPr>
+        </p:nvSpPr>
+        <p:spPr>
+          <a:xfrm>
+            <a:off x="0" y="8685213"/>
+            <a:ext cx="2971800" cy="458787"/>
+          </a:xfrm>
+          <a:prstGeom prst="rect">
+            <a:avLst/>
+          </a:prstGeom>
+        </p:spPr>
+        <p:txBody>
+          <a:bodyPr vert="horz" lIns="91440" tIns="45720" rIns="91440" bIns="45720" rtlCol="0" anchor="b"/>
+          <a:lstStyle>
+            <a:lvl1pPr algn="l">
+              <a:defRPr sz="1200"/>
+            </a:lvl1pPr>
+          </a:lstStyle>
+          <a:p>
+            <a:endParaRPr kumimoji="1" lang="ja-JP" altLang="en-US"/>
+          </a:p>
+        </p:txBody>
+      </p:sp>
+      <p:sp>
+        <p:nvSpPr>
+          <p:cNvPr id="7" name="スライド番号プレースホルダー 6"/>
+          <p:cNvSpPr>
+            <a:spLocks noGrp="1"/>
+          </p:cNvSpPr>
+          <p:nvPr>
+            <p:ph type="sldNum" sz="quarter" idx="5"/>
+          </p:nvPr>
+        </p:nvSpPr>
+        <p:spPr>
+          <a:xfrm>
+            <a:off x="3884613" y="8685213"/>
+            <a:ext cx="2971800" cy="458787"/>
+          </a:xfrm>
+          <a:prstGeom prst="rect">
+            <a:avLst/>
+          </a:prstGeom>
+        </p:spPr>
+        <p:txBody>
+          <a:bodyPr vert="horz" lIns="91440" tIns="45720" rIns="91440" bIns="45720" rtlCol="0" anchor="b"/>
+          <a:lstStyle>
+            <a:lvl1pPr algn="r">
+              <a:defRPr sz="1200"/>
+            </a:lvl1pPr>
+          </a:lstStyle>
+          <a:p>
+            <a:fld id="{8AD5128C-536B-C54F-97A7-8CD1E67D372D}" type="slidenum">
+              <a:rPr kumimoji="1" lang="ja-JP" altLang="en-US" smtClean="0"/>
+              <a:t>‹#›</a:t>
+            </a:fld>
+            <a:endParaRPr kumimoji="1" lang="ja-JP" altLang="en-US"/>
+          </a:p>
+        </p:txBody>
+      </p:sp>
+    </p:spTree>
+    <p:extLst>
+      <p:ext uri="{BB962C8B-B14F-4D97-AF65-F5344CB8AC3E}">
+        <p14:creationId xmlns:p14="http://schemas.microsoft.com/office/powerpoint/2010/main" val="3290857801"/>
+      </p:ext>
+    </p:extLst>
+  </p:cSld>
+  <p:clrMap bg1="lt1" tx1="dk1" bg2="lt2" tx2="dk2" accent1="accent1" accent2="accent2" accent3="accent3" accent4="accent4" accent5="accent5" accent6="accent6" hlink="hlink" folHlink="folHlink"/>
+  <p:notesStyle>
+    <a:lvl1pPr marL="0" algn="l" defTabSz="914400" rtl="0" eaLnBrk="1" latinLnBrk="0" hangingPunct="1">
+      <a:defRPr kumimoji="1" sz="1200" kern="1200">
+        <a:solidFill>
+          <a:schemeClr val="tx1"/>
+        </a:solidFill>
+        <a:latin typeface="+mn-lt"/>
+        <a:ea typeface="+mn-ea"/>
+        <a:cs typeface="+mn-cs"/>
+      </a:defRPr>
+    </a:lvl1pPr>
+    <a:lvl2pPr marL="457200" algn="l" defTabSz="914400" rtl="0" eaLnBrk="1" latinLnBrk="0" hangingPunct="1">
+      <a:defRPr kumimoji="1" sz="1200" kern="1200">
+        <a:solidFill>
+          <a:schemeClr val="tx1"/>
+        </a:solidFill>
+        <a:latin typeface="+mn-lt"/>
+        <a:ea typeface="+mn-ea"/>
+        <a:cs typeface="+mn-cs"/>
+      </a:defRPr>
+    </a:lvl2pPr>
+    <a:lvl3pPr marL="914400" algn="l" defTabSz="914400" rtl="0" eaLnBrk="1" latinLnBrk="0" hangingPunct="1">
+      <a:defRPr kumimoji="1" sz="1200" kern="1200">
+        <a:solidFill>
+          <a:schemeClr val="tx1"/>
+        </a:solidFill>
+        <a:latin typeface="+mn-lt"/>
+        <a:ea typeface="+mn-ea"/>
+        <a:cs typeface="+mn-cs"/>
+      </a:defRPr>
+    </a:lvl3pPr>
+    <a:lvl4pPr marL="1371600" algn="l" defTabSz="914400" rtl="0" eaLnBrk="1" latinLnBrk="0" hangingPunct="1">
+      <a:defRPr kumimoji="1" sz="1200" kern="1200">
+        <a:solidFill>
+          <a:schemeClr val="tx1"/>
+        </a:solidFill>
+        <a:latin typeface="+mn-lt"/>
+        <a:ea typeface="+mn-ea"/>
+        <a:cs typeface="+mn-cs"/>
+      </a:defRPr>
+    </a:lvl4pPr>
+    <a:lvl5pPr marL="1828800" algn="l" defTabSz="914400" rtl="0" eaLnBrk="1" latinLnBrk="0" hangingPunct="1">
+      <a:defRPr kumimoji="1" sz="1200" kern="1200">
+        <a:solidFill>
+          <a:schemeClr val="tx1"/>
+        </a:solidFill>
+        <a:latin typeface="+mn-lt"/>
+        <a:ea typeface="+mn-ea"/>
+        <a:cs typeface="+mn-cs"/>
+      </a:defRPr>
+    </a:lvl5pPr>
+    <a:lvl6pPr marL="2286000" algn="l" defTabSz="914400" rtl="0" eaLnBrk="1" latinLnBrk="0" hangingPunct="1">
+      <a:defRPr kumimoji="1" sz="1200" kern="1200">
+        <a:solidFill>
+          <a:schemeClr val="tx1"/>
+        </a:solidFill>
+        <a:latin typeface="+mn-lt"/>
+        <a:ea typeface="+mn-ea"/>
+        <a:cs typeface="+mn-cs"/>
+      </a:defRPr>
+    </a:lvl6pPr>
+    <a:lvl7pPr marL="2743200" algn="l" defTabSz="914400" rtl="0" eaLnBrk="1" latinLnBrk="0" hangingPunct="1">
+      <a:defRPr kumimoji="1" sz="1200" kern="1200">
+        <a:solidFill>
+          <a:schemeClr val="tx1"/>
+        </a:solidFill>
+        <a:latin typeface="+mn-lt"/>
+        <a:ea typeface="+mn-ea"/>
+        <a:cs typeface="+mn-cs"/>
+      </a:defRPr>
+    </a:lvl7pPr>
+    <a:lvl8pPr marL="3200400" algn="l" defTabSz="914400" rtl="0" eaLnBrk="1" latinLnBrk="0" hangingPunct="1">
+      <a:defRPr kumimoji="1" sz="1200" kern="1200">
+        <a:solidFill>
+          <a:schemeClr val="tx1"/>
+        </a:solidFill>
+        <a:latin typeface="+mn-lt"/>
+        <a:ea typeface="+mn-ea"/>
+        <a:cs typeface="+mn-cs"/>
+      </a:defRPr>
+    </a:lvl8pPr>
+    <a:lvl9pPr marL="3657600" algn="l" defTabSz="914400" rtl="0" eaLnBrk="1" latinLnBrk="0" hangingPunct="1">
+      <a:defRPr kumimoji="1" sz="1200" kern="1200">
+        <a:solidFill>
+          <a:schemeClr val="tx1"/>
+        </a:solidFill>
+        <a:latin typeface="+mn-lt"/>
+        <a:ea typeface="+mn-ea"/>
+        <a:cs typeface="+mn-cs"/>
+      </a:defRPr>
+    </a:lvl9pPr>
+  </p:notesStyle>
+</p:notesMaster>
+</file>
+
+<file path=ppt/notesSlides/notesSlide1.xml><?xml version="1.0" encoding="utf-8"?>
+<p:notes xmlns:a="http://schemas.openxmlformats.org/drawingml/2006/main" xmlns:r="http://schemas.openxmlformats.org/officeDocument/2006/relationships" xmlns:p="http://schemas.openxmlformats.org/presentationml/2006/main">
+  <p:cSld>
+    <p:spTree>
+      <p:nvGrpSpPr>
+        <p:cNvPr id="1" name=""/>
+        <p:cNvGrpSpPr/>
+        <p:nvPr/>
+      </p:nvGrpSpPr>
+      <p:grpSpPr>
+        <a:xfrm>
+          <a:off x="0" y="0"/>
+          <a:ext cx="0" cy="0"/>
+          <a:chOff x="0" y="0"/>
+          <a:chExt cx="0" cy="0"/>
+        </a:xfrm>
+      </p:grpSpPr>
+      <p:sp>
+        <p:nvSpPr>
+          <p:cNvPr id="2" name="スライド イメージ プレースホルダー 1"/>
+          <p:cNvSpPr>
+            <a:spLocks noGrp="1" noRot="1" noChangeAspect="1"/>
+          </p:cNvSpPr>
+          <p:nvPr>
+            <p:ph type="sldImg"/>
+          </p:nvPr>
+        </p:nvSpPr>
+        <p:spPr/>
+      </p:sp>
+      <p:sp>
+        <p:nvSpPr>
+          <p:cNvPr id="3" name="ノート プレースホルダー 2"/>
+          <p:cNvSpPr>
+            <a:spLocks noGrp="1"/>
+          </p:cNvSpPr>
+          <p:nvPr>
+            <p:ph type="body" idx="1"/>
+          </p:nvPr>
+        </p:nvSpPr>
+        <p:spPr/>
+        <p:txBody>
+          <a:bodyPr/>
+          <a:lstStyle/>
+          <a:p>
+            <a:r>
+              <a:rPr kumimoji="1" lang="ja-JP" altLang="ja-JP" sz="1200" b="0" i="0" kern="1200">
+                <a:solidFill>
+                  <a:schemeClr val="tx1"/>
+                </a:solidFill>
+                <a:effectLst/>
+                <a:latin typeface="+mn-lt"/>
+                <a:ea typeface="+mn-ea"/>
+                <a:cs typeface="+mn-cs"/>
+              </a:rPr>
+              <a:t>Q1：「マレルチームは結局どこで関わる？」</a:t>
+            </a:r>
+          </a:p>
+          <a:p>
+            <a:r>
+              <a:rPr kumimoji="1" lang="ja-JP" altLang="ja-JP" sz="1200" b="0" i="0" kern="1200">
+                <a:solidFill>
+                  <a:schemeClr val="tx1"/>
+                </a:solidFill>
+                <a:effectLst/>
+                <a:latin typeface="+mn-lt"/>
+                <a:ea typeface="+mn-ea"/>
+                <a:cs typeface="+mn-cs"/>
+              </a:rPr>
+              <a:t>マレルは Step 3、2026年10月以降からの対象 です。マレル自身が既に SNS・動画コンテンツで自走しているので、私と須藤さん・松浦さんのループが回ってから接続します。早く接続しすぎると仕組みが未完成で混乱します。</a:t>
+            </a:r>
+          </a:p>
+          <a:p>
+            <a:r>
+              <a:rPr kumimoji="1" lang="ja-JP" altLang="ja-JP" sz="1200" b="0" i="0" kern="1200">
+                <a:solidFill>
+                  <a:schemeClr val="tx1"/>
+                </a:solidFill>
+                <a:effectLst/>
+                <a:latin typeface="+mn-lt"/>
+                <a:ea typeface="+mn-ea"/>
+                <a:cs typeface="+mn-cs"/>
+              </a:rPr>
+              <a:t>Q2：「3段階モデル、本当に2027 Q1 で完成する？」</a:t>
+            </a:r>
+          </a:p>
+          <a:p>
+            <a:r>
+              <a:rPr kumimoji="1" lang="ja-JP" altLang="ja-JP" sz="1200" b="0" i="0" kern="1200">
+                <a:solidFill>
+                  <a:schemeClr val="tx1"/>
+                </a:solidFill>
+                <a:effectLst/>
+                <a:latin typeface="+mn-lt"/>
+                <a:ea typeface="+mn-ea"/>
+                <a:cs typeface="+mn-cs"/>
+              </a:rPr>
+              <a:t>正直、Step 1 が 2026年7月に完成できるかが鍵 です。週次マイクロデリバラブルで進めるので、4週間ごとに軌道修正できます。遅れる場合は、Step 1 を伸ばして Step 2-3 を圧縮するか、スコープを縮める判断をします。ウォーターフォール型の硬直は避けられる設計です。</a:t>
+            </a:r>
+          </a:p>
+          <a:p>
+            <a:r>
+              <a:rPr kumimoji="1" lang="ja-JP" altLang="ja-JP" sz="1200" b="0" i="0" kern="1200">
+                <a:solidFill>
+                  <a:schemeClr val="tx1"/>
+                </a:solidFill>
+                <a:effectLst/>
+                <a:latin typeface="+mn-lt"/>
+                <a:ea typeface="+mn-ea"/>
+                <a:cs typeface="+mn-cs"/>
+              </a:rPr>
+              <a:t>Q3：「Marc と被るんじゃない？」</a:t>
+            </a:r>
+          </a:p>
+          <a:p>
+            <a:r>
+              <a:rPr kumimoji="1" lang="ja-JP" altLang="ja-JP" sz="1200" b="0" i="0" kern="1200">
+                <a:solidFill>
+                  <a:schemeClr val="tx1"/>
+                </a:solidFill>
+                <a:effectLst/>
+                <a:latin typeface="+mn-lt"/>
+                <a:ea typeface="+mn-ea"/>
+                <a:cs typeface="+mn-cs"/>
+              </a:rPr>
+              <a:t>ポジショニングが違います。Marc は Wide &amp; Fast、私は Middle &amp; Fast。Marc は ARCHECO の右側、私は左側。peer として情報交換するので、被るのではなく 二輪化 します。共通インフラ（環境・プロンプト技術）は共有して、ブランド固有データだけ別管理にします。</a:t>
+            </a:r>
+          </a:p>
+          <a:p>
+            <a:r>
+              <a:rPr kumimoji="1" lang="ja-JP" altLang="ja-JP" sz="1200" b="0" i="0" kern="1200">
+                <a:solidFill>
+                  <a:schemeClr val="tx1"/>
+                </a:solidFill>
+                <a:effectLst/>
+                <a:latin typeface="+mn-lt"/>
+                <a:ea typeface="+mn-ea"/>
+                <a:cs typeface="+mn-cs"/>
+              </a:rPr>
+              <a:t>Q4：「英語の壁、本当に問題ないの？」</a:t>
+            </a:r>
+          </a:p>
+          <a:p>
+            <a:r>
+              <a:rPr kumimoji="1" lang="ja-JP" altLang="ja-JP" sz="1200" b="0" i="0" kern="1200">
+                <a:solidFill>
+                  <a:schemeClr val="tx1"/>
+                </a:solidFill>
+                <a:effectLst/>
+                <a:latin typeface="+mn-lt"/>
+                <a:ea typeface="+mn-ea"/>
+                <a:cs typeface="+mn-cs"/>
+              </a:rPr>
+              <a:t>Slack ベースなので、Claude で翻訳しながら書けます。対面英語の即時性は不要。文書化された議論なら、私のほうが深く考えられます。Marc とのキャッチボールの議事録も日本語に翻訳して残します。</a:t>
+            </a:r>
+          </a:p>
+          <a:p>
+            <a:r>
+              <a:rPr kumimoji="1" lang="ja-JP" altLang="ja-JP" sz="1200" b="0" i="0" kern="1200">
+                <a:solidFill>
+                  <a:schemeClr val="tx1"/>
+                </a:solidFill>
+                <a:effectLst/>
+                <a:latin typeface="+mn-lt"/>
+                <a:ea typeface="+mn-ea"/>
+                <a:cs typeface="+mn-cs"/>
+              </a:rPr>
+              <a:t>Q5：「Tier 1 cleanup ブランチはどうなる？」</a:t>
+            </a:r>
+          </a:p>
+          <a:p>
+            <a:r>
+              <a:rPr kumimoji="1" lang="ja-JP" altLang="ja-JP" sz="1200" b="0" i="0" kern="1200">
+                <a:solidFill>
+                  <a:schemeClr val="tx1"/>
+                </a:solidFill>
+                <a:effectLst/>
+                <a:latin typeface="+mn-lt"/>
+                <a:ea typeface="+mn-ea"/>
+                <a:cs typeface="+mn-cs"/>
+              </a:rPr>
+              <a:t>feat/materials-tier1-cleanup に 保管済 です。Flywheel が落ち着いたら戻って完了させます（残：M1 logo整理 / M2 sections棚卸し）。今は Flywheel の方が事業インパクトが大きいので優先します。</a:t>
+            </a:r>
+          </a:p>
+          <a:p>
+            <a:r>
+              <a:rPr kumimoji="1" lang="ja-JP" altLang="ja-JP" sz="1200" b="0" i="0" kern="1200">
+                <a:solidFill>
+                  <a:schemeClr val="tx1"/>
+                </a:solidFill>
+                <a:effectLst/>
+                <a:latin typeface="+mn-lt"/>
+                <a:ea typeface="+mn-ea"/>
+                <a:cs typeface="+mn-cs"/>
+              </a:rPr>
+              <a:t>Q6：「これ、いつ収益化される？」</a:t>
+            </a:r>
+          </a:p>
+          <a:p>
+            <a:r>
+              <a:rPr kumimoji="1" lang="ja-JP" altLang="ja-JP" sz="1200" b="0" i="0" kern="1200">
+                <a:solidFill>
+                  <a:schemeClr val="tx1"/>
+                </a:solidFill>
+                <a:effectLst/>
+                <a:latin typeface="+mn-lt"/>
+                <a:ea typeface="+mn-ea"/>
+                <a:cs typeface="+mn-cs"/>
+              </a:rPr>
+              <a:t>MVP の外側の議論 です。Step 3 完成、2027 Q1 後にマルチブランド展開で他案件にも適用可能になります。ARCHECO 全体のデザイン生産性 10倍化 = 案件数増 = 収益増、というロジック。今は MVP 完成を最優先で、収益化計画は後段で詰めます。</a:t>
+            </a:r>
+          </a:p>
+          <a:p>
+            <a:r>
+              <a:rPr kumimoji="1" lang="ja-JP" altLang="ja-JP" sz="1200" b="0" i="0" kern="1200">
+                <a:solidFill>
+                  <a:schemeClr val="tx1"/>
+                </a:solidFill>
+                <a:effectLst/>
+                <a:latin typeface="+mn-lt"/>
+                <a:ea typeface="+mn-ea"/>
+                <a:cs typeface="+mn-cs"/>
+              </a:rPr>
+              <a:t>Q7：「Learn 層を Step 1 から保護、具体的に何をする？」★Marc 反映</a:t>
+            </a:r>
+          </a:p>
+          <a:p>
+            <a:r>
+              <a:rPr kumimoji="1" lang="ja-JP" altLang="ja-JP" sz="1200" b="0" i="0" kern="1200">
+                <a:solidFill>
+                  <a:schemeClr val="tx1"/>
+                </a:solidFill>
+                <a:effectLst/>
+                <a:latin typeface="+mn-lt"/>
+                <a:ea typeface="+mn-ea"/>
+                <a:cs typeface="+mn-cs"/>
+              </a:rPr>
+              <a:t>3つです：</a:t>
+            </a:r>
+          </a:p>
+          <a:p>
+            <a:r>
+              <a:rPr kumimoji="1" lang="ja-JP" altLang="ja-JP" sz="1200" b="0" i="0" kern="1200">
+                <a:solidFill>
+                  <a:schemeClr val="tx1"/>
+                </a:solidFill>
+                <a:effectLst/>
+                <a:latin typeface="+mn-lt"/>
+                <a:ea typeface="+mn-ea"/>
+                <a:cs typeface="+mn-cs"/>
+              </a:rPr>
+              <a:t>Generate で失敗が出るたびに bugs.md に候補エントリ追加</a:t>
+            </a:r>
+          </a:p>
+          <a:p>
+            <a:r>
+              <a:rPr kumimoji="1" lang="ja-JP" altLang="ja-JP" sz="1200" b="0" i="0" kern="1200">
+                <a:solidFill>
+                  <a:schemeClr val="tx1"/>
+                </a:solidFill>
+                <a:effectLst/>
+                <a:latin typeface="+mn-lt"/>
+                <a:ea typeface="+mn-ea"/>
+                <a:cs typeface="+mn-cs"/>
+              </a:rPr>
+              <a:t>同じ修正を2回説明したら、即ルール化（Marc の M2 原則）</a:t>
+            </a:r>
+          </a:p>
+          <a:p>
+            <a:r>
+              <a:rPr kumimoji="1" lang="ja-JP" altLang="ja-JP" sz="1200" b="0" i="0" kern="1200">
+                <a:solidFill>
+                  <a:schemeClr val="tx1"/>
+                </a:solidFill>
+                <a:effectLst/>
+                <a:latin typeface="+mn-lt"/>
+                <a:ea typeface="+mn-ea"/>
+                <a:cs typeface="+mn-cs"/>
+              </a:rPr>
+              <a:t>bugs.md の追加件数を月1回可視化 して、停滞を検知</a:t>
+            </a:r>
+          </a:p>
+          <a:p>
+            <a:r>
+              <a:rPr kumimoji="1" lang="ja-JP" altLang="ja-JP" sz="1200" b="0" i="0" kern="1200">
+                <a:solidFill>
+                  <a:schemeClr val="tx1"/>
+                </a:solidFill>
+                <a:effectLst/>
+                <a:latin typeface="+mn-lt"/>
+                <a:ea typeface="+mn-ea"/>
+                <a:cs typeface="+mn-cs"/>
+              </a:rPr>
+              <a:t>さらに、この金曜事業開発の「今週の Learn 進捗」を恒久発表項目 にします。</a:t>
+            </a:r>
+            <a:br>
+              <a:rPr kumimoji="1" lang="en-US" altLang="ja-JP" sz="1200" b="0" i="0" kern="1200" dirty="0">
+                <a:solidFill>
+                  <a:schemeClr val="tx1"/>
+                </a:solidFill>
+                <a:effectLst/>
+                <a:latin typeface="+mn-lt"/>
+                <a:ea typeface="+mn-ea"/>
+                <a:cs typeface="+mn-cs"/>
+              </a:rPr>
+            </a:br>
+            <a:endParaRPr kumimoji="1" lang="ja-JP" altLang="ja-JP" sz="1200" b="0" i="0" kern="1200">
+              <a:solidFill>
+                <a:schemeClr val="tx1"/>
+              </a:solidFill>
+              <a:effectLst/>
+              <a:latin typeface="+mn-lt"/>
+              <a:ea typeface="+mn-ea"/>
+              <a:cs typeface="+mn-cs"/>
+            </a:endParaRPr>
+          </a:p>
+          <a:p>
+            <a:r>
+              <a:rPr kumimoji="1" lang="ja-JP" altLang="ja-JP" sz="1200" b="0" i="0" kern="1200">
+                <a:solidFill>
+                  <a:schemeClr val="tx1"/>
+                </a:solidFill>
+                <a:effectLst/>
+                <a:latin typeface="+mn-lt"/>
+                <a:ea typeface="+mn-ea"/>
+                <a:cs typeface="+mn-cs"/>
+              </a:rPr>
+              <a:t>Q8：「brand/fambox/CLAUDE.md って何が書いてある？」★Marc 反映</a:t>
+            </a:r>
+          </a:p>
+          <a:p>
+            <a:r>
+              <a:rPr kumimoji="1" lang="ja-JP" altLang="ja-JP" sz="1200" b="0" i="0" kern="1200">
+                <a:solidFill>
+                  <a:schemeClr val="tx1"/>
+                </a:solidFill>
+                <a:effectLst/>
+                <a:latin typeface="+mn-lt"/>
+                <a:ea typeface="+mn-ea"/>
+                <a:cs typeface="+mn-cs"/>
+              </a:rPr>
+              <a:t>1ファイルで FAMBOX のすべての判断基準を集約しています。</a:t>
+            </a:r>
+          </a:p>
+          <a:p>
+            <a:r>
+              <a:rPr kumimoji="1" lang="ja-JP" altLang="ja-JP" sz="1200" b="0" i="0" kern="1200">
+                <a:solidFill>
+                  <a:schemeClr val="tx1"/>
+                </a:solidFill>
+                <a:effectLst/>
+                <a:latin typeface="+mn-lt"/>
+                <a:ea typeface="+mn-ea"/>
+                <a:cs typeface="+mn-cs"/>
+              </a:rPr>
+              <a:t>Identity（ブランドの中核）</a:t>
+            </a:r>
+          </a:p>
+          <a:p>
+            <a:r>
+              <a:rPr kumimoji="1" lang="ja-JP" altLang="ja-JP" sz="1200" b="0" i="0" kern="1200">
+                <a:solidFill>
+                  <a:schemeClr val="tx1"/>
+                </a:solidFill>
+                <a:effectLst/>
+                <a:latin typeface="+mn-lt"/>
+                <a:ea typeface="+mn-ea"/>
+                <a:cs typeface="+mn-cs"/>
+              </a:rPr>
+              <a:t>Surfaces（出力面の分類、9種類）</a:t>
+            </a:r>
+          </a:p>
+          <a:p>
+            <a:r>
+              <a:rPr kumimoji="1" lang="ja-JP" altLang="ja-JP" sz="1200" b="0" i="0" kern="1200">
+                <a:solidFill>
+                  <a:schemeClr val="tx1"/>
+                </a:solidFill>
+                <a:effectLst/>
+                <a:latin typeface="+mn-lt"/>
+                <a:ea typeface="+mn-ea"/>
+                <a:cs typeface="+mn-cs"/>
+              </a:rPr>
+              <a:t>Hard Rules（絶対に守るルール + 反例ペアリング）</a:t>
+            </a:r>
+          </a:p>
+          <a:p>
+            <a:r>
+              <a:rPr kumimoji="1" lang="ja-JP" altLang="ja-JP" sz="1200" b="0" i="0" kern="1200">
+                <a:solidFill>
+                  <a:schemeClr val="tx1"/>
+                </a:solidFill>
+                <a:effectLst/>
+                <a:latin typeface="+mn-lt"/>
+                <a:ea typeface="+mn-ea"/>
+                <a:cs typeface="+mn-cs"/>
+              </a:rPr>
+              <a:t>AI/Human Boundary（誰が何を担当するか、4カテゴリ）</a:t>
+            </a:r>
+          </a:p>
+          <a:p>
+            <a:r>
+              <a:rPr kumimoji="1" lang="ja-JP" altLang="ja-JP" sz="1200" b="0" i="0" kern="1200">
+                <a:solidFill>
+                  <a:schemeClr val="tx1"/>
+                </a:solidFill>
+                <a:effectLst/>
+                <a:latin typeface="+mn-lt"/>
+                <a:ea typeface="+mn-ea"/>
+                <a:cs typeface="+mn-cs"/>
+              </a:rPr>
+              <a:t>Vocabulary（重要用語）</a:t>
+            </a:r>
+          </a:p>
+          <a:p>
+            <a:r>
+              <a:rPr kumimoji="1" lang="ja-JP" altLang="ja-JP" sz="1200" b="0" i="0" kern="1200">
+                <a:solidFill>
+                  <a:schemeClr val="tx1"/>
+                </a:solidFill>
+                <a:effectLst/>
+                <a:latin typeface="+mn-lt"/>
+                <a:ea typeface="+mn-ea"/>
+                <a:cs typeface="+mn-cs"/>
+              </a:rPr>
+              <a:t>Exclusions（絶対にやらないこと、過去失敗 A〜H）</a:t>
+            </a:r>
+          </a:p>
+          <a:p>
+            <a:r>
+              <a:rPr kumimoji="1" lang="ja-JP" altLang="ja-JP" sz="1200" b="0" i="0" kern="1200">
+                <a:solidFill>
+                  <a:schemeClr val="tx1"/>
+                </a:solidFill>
+                <a:effectLst/>
+                <a:latin typeface="+mn-lt"/>
+                <a:ea typeface="+mn-ea"/>
+                <a:cs typeface="+mn-cs"/>
+              </a:rPr>
+              <a:t>Onboarding Flow（新メンバーの最初の30分）</a:t>
+            </a:r>
+          </a:p>
+          <a:p>
+            <a:r>
+              <a:rPr kumimoji="1" lang="ja-JP" altLang="ja-JP" sz="1200" b="0" i="0" kern="1200">
+                <a:solidFill>
+                  <a:schemeClr val="tx1"/>
+                </a:solidFill>
+                <a:effectLst/>
+                <a:latin typeface="+mn-lt"/>
+                <a:ea typeface="+mn-ea"/>
+                <a:cs typeface="+mn-cs"/>
+              </a:rPr>
+              <a:t>テンプレ集（持ってこい資料 / Good-Bad / boundary 宣言 等）</a:t>
+            </a:r>
+            <a:br>
+              <a:rPr kumimoji="1" lang="en-US" altLang="ja-JP" sz="1200" b="0" i="0" kern="1200" dirty="0">
+                <a:solidFill>
+                  <a:schemeClr val="tx1"/>
+                </a:solidFill>
+                <a:effectLst/>
+                <a:latin typeface="+mn-lt"/>
+                <a:ea typeface="+mn-ea"/>
+                <a:cs typeface="+mn-cs"/>
+              </a:rPr>
+            </a:br>
+            <a:br>
+              <a:rPr kumimoji="1" lang="en-US" altLang="ja-JP" sz="1200" b="0" i="0" kern="1200" dirty="0">
+                <a:solidFill>
+                  <a:schemeClr val="tx1"/>
+                </a:solidFill>
+                <a:effectLst/>
+                <a:latin typeface="+mn-lt"/>
+                <a:ea typeface="+mn-ea"/>
+                <a:cs typeface="+mn-cs"/>
+              </a:rPr>
+            </a:br>
+            <a:r>
+              <a:rPr kumimoji="1" lang="ja-JP" altLang="ja-JP" sz="1200" b="0" i="0" kern="1200">
+                <a:solidFill>
+                  <a:schemeClr val="tx1"/>
+                </a:solidFill>
+                <a:effectLst/>
+                <a:latin typeface="+mn-lt"/>
+                <a:ea typeface="+mn-ea"/>
+                <a:cs typeface="+mn-cs"/>
+              </a:rPr>
+              <a:t>Q9：「peer ネットワーク、実際の運用はどうなる？」★Marc 反映</a:t>
+            </a:r>
+          </a:p>
+          <a:p>
+            <a:r>
+              <a:rPr kumimoji="1" lang="ja-JP" altLang="ja-JP" sz="1200" b="0" i="0" kern="1200">
+                <a:solidFill>
+                  <a:schemeClr val="tx1"/>
+                </a:solidFill>
+                <a:effectLst/>
+                <a:latin typeface="+mn-lt"/>
+                <a:ea typeface="+mn-ea"/>
+                <a:cs typeface="+mn-cs"/>
+              </a:rPr>
+              <a:t>Slack ベースの asynchronous + as-needed です。</a:t>
+            </a:r>
+          </a:p>
+          <a:p>
+            <a:r>
+              <a:rPr kumimoji="1" lang="ja-JP" altLang="ja-JP" sz="1200" b="0" i="0" kern="1200">
+                <a:solidFill>
+                  <a:schemeClr val="tx1"/>
+                </a:solidFill>
+                <a:effectLst/>
+                <a:latin typeface="+mn-lt"/>
+                <a:ea typeface="+mn-ea"/>
+                <a:cs typeface="+mn-cs"/>
+              </a:rPr>
+              <a:t>詳細質問は手を動かす過程で都度</a:t>
+            </a:r>
+          </a:p>
+          <a:p>
+            <a:r>
+              <a:rPr kumimoji="1" lang="ja-JP" altLang="ja-JP" sz="1200" b="0" i="0" kern="1200">
+                <a:solidFill>
+                  <a:schemeClr val="tx1"/>
+                </a:solidFill>
+                <a:effectLst/>
+                <a:latin typeface="+mn-lt"/>
+                <a:ea typeface="+mn-ea"/>
+                <a:cs typeface="+mn-cs"/>
+              </a:rPr>
+              <a:t>重要な学びは DECISIONS.md に追加</a:t>
+            </a:r>
+          </a:p>
+          <a:p>
+            <a:r>
+              <a:rPr kumimoji="1" lang="ja-JP" altLang="ja-JP" sz="1200" b="0" i="0" kern="1200">
+                <a:solidFill>
+                  <a:schemeClr val="tx1"/>
+                </a:solidFill>
+                <a:effectLst/>
+                <a:latin typeface="+mn-lt"/>
+                <a:ea typeface="+mn-ea"/>
+                <a:cs typeface="+mn-cs"/>
+              </a:rPr>
+              <a:t>議事録は sessions/ に蓄積</a:t>
+            </a:r>
+          </a:p>
+          <a:p>
+            <a:r>
+              <a:rPr kumimoji="1" lang="ja-JP" altLang="ja-JP" sz="1200" b="0" i="0" kern="1200">
+                <a:solidFill>
+                  <a:schemeClr val="tx1"/>
+                </a:solidFill>
+                <a:effectLst/>
+                <a:latin typeface="+mn-lt"/>
+                <a:ea typeface="+mn-ea"/>
+                <a:cs typeface="+mn-cs"/>
+              </a:rPr>
+              <a:t>月1回くらい、レベル合わせのまとめ会も検討</a:t>
+            </a:r>
+          </a:p>
+          <a:p>
+            <a:endParaRPr kumimoji="1" lang="ja-JP" altLang="ja-JP" sz="1200" b="0" i="0" kern="1200">
+              <a:solidFill>
+                <a:schemeClr val="tx1"/>
+              </a:solidFill>
+              <a:effectLst/>
+              <a:latin typeface="+mn-lt"/>
+              <a:ea typeface="+mn-ea"/>
+              <a:cs typeface="+mn-cs"/>
+            </a:endParaRPr>
+          </a:p>
+          <a:p>
+            <a:endParaRPr kumimoji="1" lang="ja-JP" altLang="en-US"/>
+          </a:p>
+        </p:txBody>
+      </p:sp>
+      <p:sp>
+        <p:nvSpPr>
+          <p:cNvPr id="4" name="スライド番号プレースホルダー 3"/>
+          <p:cNvSpPr>
+            <a:spLocks noGrp="1"/>
+          </p:cNvSpPr>
+          <p:nvPr>
+            <p:ph type="sldNum" sz="quarter" idx="5"/>
+          </p:nvPr>
+        </p:nvSpPr>
+        <p:spPr/>
+        <p:txBody>
+          <a:bodyPr/>
+          <a:lstStyle/>
+          <a:p>
+            <a:fld id="{8AD5128C-536B-C54F-97A7-8CD1E67D372D}" type="slidenum">
+              <a:rPr kumimoji="1" lang="ja-JP" altLang="en-US" smtClean="0"/>
+              <a:t>11</a:t>
+            </a:fld>
+            <a:endParaRPr kumimoji="1" lang="ja-JP" altLang="en-US"/>
+          </a:p>
+        </p:txBody>
+      </p:sp>
+    </p:spTree>
+    <p:extLst>
+      <p:ext uri="{BB962C8B-B14F-4D97-AF65-F5344CB8AC3E}">
+        <p14:creationId xmlns:p14="http://schemas.microsoft.com/office/powerpoint/2010/main" val="1287449377"/>
+      </p:ext>
+    </p:extLst>
+  </p:cSld>
+  <p:clrMapOvr>
+    <a:masterClrMapping/>
+  </p:clrMapOvr>
+</p:notes>
 </file>
 
 <file path=ppt/slideLayouts/slideLayout1.xml><?xml version="1.0" encoding="utf-8"?>
@@ -156,10 +1167,9 @@
           <a:lstStyle/>
           <a:p>
             <a:r>
-              <a:rPr lang="en-US" smtClean="0"/>
+              <a:rPr lang="en-US"/>
               <a:t>Click to edit Master title style</a:t>
             </a:r>
-            <a:endParaRPr lang="en-US"/>
           </a:p>
         </p:txBody>
       </p:sp>
@@ -275,10 +1285,9 @@
           </a:lstStyle>
           <a:p>
             <a:r>
-              <a:rPr lang="en-US" smtClean="0"/>
+              <a:rPr lang="en-US"/>
               <a:t>Click to edit Master subtitle style</a:t>
             </a:r>
-            <a:endParaRPr lang="en-US"/>
           </a:p>
         </p:txBody>
       </p:sp>
@@ -299,7 +1308,7 @@
           <a:p>
             <a:fld id="{5BCAD085-E8A6-8845-BD4E-CB4CCA059FC4}" type="datetimeFigureOut">
               <a:rPr lang="en-US" smtClean="0"/>
-              <a:t>1/27/13</a:t>
+              <a:t>6/2/26</a:t>
             </a:fld>
             <a:endParaRPr lang="en-US"/>
           </a:p>
@@ -393,10 +1402,9 @@
           <a:lstStyle/>
           <a:p>
             <a:r>
-              <a:rPr lang="en-US" smtClean="0"/>
+              <a:rPr lang="en-US"/>
               <a:t>Click to edit Master title style</a:t>
             </a:r>
-            <a:endParaRPr lang="en-US"/>
           </a:p>
         </p:txBody>
       </p:sp>
@@ -417,38 +1425,37 @@
           <a:p>
             <a:pPr lvl="0"/>
             <a:r>
-              <a:rPr lang="en-US" smtClean="0"/>
+              <a:rPr lang="en-US"/>
               <a:t>Click to edit Master text styles</a:t>
             </a:r>
           </a:p>
           <a:p>
             <a:pPr lvl="1"/>
             <a:r>
-              <a:rPr lang="en-US" smtClean="0"/>
+              <a:rPr lang="en-US"/>
               <a:t>Second level</a:t>
             </a:r>
           </a:p>
           <a:p>
             <a:pPr lvl="2"/>
             <a:r>
-              <a:rPr lang="en-US" smtClean="0"/>
+              <a:rPr lang="en-US"/>
               <a:t>Third level</a:t>
             </a:r>
           </a:p>
           <a:p>
             <a:pPr lvl="3"/>
             <a:r>
-              <a:rPr lang="en-US" smtClean="0"/>
+              <a:rPr lang="en-US"/>
               <a:t>Fourth level</a:t>
             </a:r>
           </a:p>
           <a:p>
             <a:pPr lvl="4"/>
             <a:r>
-              <a:rPr lang="en-US" smtClean="0"/>
+              <a:rPr lang="en-US"/>
               <a:t>Fifth level</a:t>
             </a:r>
-            <a:endParaRPr lang="en-US"/>
           </a:p>
         </p:txBody>
       </p:sp>
@@ -469,7 +1476,7 @@
           <a:p>
             <a:fld id="{5BCAD085-E8A6-8845-BD4E-CB4CCA059FC4}" type="datetimeFigureOut">
               <a:rPr lang="en-US" smtClean="0"/>
-              <a:t>1/27/13</a:t>
+              <a:t>6/2/26</a:t>
             </a:fld>
             <a:endParaRPr lang="en-US"/>
           </a:p>
@@ -568,10 +1575,9 @@
           <a:lstStyle/>
           <a:p>
             <a:r>
-              <a:rPr lang="en-US" smtClean="0"/>
+              <a:rPr lang="en-US"/>
               <a:t>Click to edit Master title style</a:t>
             </a:r>
-            <a:endParaRPr lang="en-US"/>
           </a:p>
         </p:txBody>
       </p:sp>
@@ -597,38 +1603,37 @@
           <a:p>
             <a:pPr lvl="0"/>
             <a:r>
-              <a:rPr lang="en-US" smtClean="0"/>
+              <a:rPr lang="en-US"/>
               <a:t>Click to edit Master text styles</a:t>
             </a:r>
           </a:p>
           <a:p>
             <a:pPr lvl="1"/>
             <a:r>
-              <a:rPr lang="en-US" smtClean="0"/>
+              <a:rPr lang="en-US"/>
               <a:t>Second level</a:t>
             </a:r>
           </a:p>
           <a:p>
             <a:pPr lvl="2"/>
             <a:r>
-              <a:rPr lang="en-US" smtClean="0"/>
+              <a:rPr lang="en-US"/>
               <a:t>Third level</a:t>
             </a:r>
           </a:p>
           <a:p>
             <a:pPr lvl="3"/>
             <a:r>
-              <a:rPr lang="en-US" smtClean="0"/>
+              <a:rPr lang="en-US"/>
               <a:t>Fourth level</a:t>
             </a:r>
           </a:p>
           <a:p>
             <a:pPr lvl="4"/>
             <a:r>
-              <a:rPr lang="en-US" smtClean="0"/>
+              <a:rPr lang="en-US"/>
               <a:t>Fifth level</a:t>
             </a:r>
-            <a:endParaRPr lang="en-US"/>
           </a:p>
         </p:txBody>
       </p:sp>
@@ -649,7 +1654,7 @@
           <a:p>
             <a:fld id="{5BCAD085-E8A6-8845-BD4E-CB4CCA059FC4}" type="datetimeFigureOut">
               <a:rPr lang="en-US" smtClean="0"/>
-              <a:t>1/27/13</a:t>
+              <a:t>6/2/26</a:t>
             </a:fld>
             <a:endParaRPr lang="en-US"/>
           </a:p>
@@ -743,10 +1748,9 @@
           <a:lstStyle/>
           <a:p>
             <a:r>
-              <a:rPr lang="en-US" smtClean="0"/>
+              <a:rPr lang="en-US"/>
               <a:t>Click to edit Master title style</a:t>
             </a:r>
-            <a:endParaRPr lang="en-US"/>
           </a:p>
         </p:txBody>
       </p:sp>
@@ -767,38 +1771,37 @@
           <a:p>
             <a:pPr lvl="0"/>
             <a:r>
-              <a:rPr lang="en-US" smtClean="0"/>
+              <a:rPr lang="en-US"/>
               <a:t>Click to edit Master text styles</a:t>
             </a:r>
           </a:p>
           <a:p>
             <a:pPr lvl="1"/>
             <a:r>
-              <a:rPr lang="en-US" smtClean="0"/>
+              <a:rPr lang="en-US"/>
               <a:t>Second level</a:t>
             </a:r>
           </a:p>
           <a:p>
             <a:pPr lvl="2"/>
             <a:r>
-              <a:rPr lang="en-US" smtClean="0"/>
+              <a:rPr lang="en-US"/>
               <a:t>Third level</a:t>
             </a:r>
           </a:p>
           <a:p>
             <a:pPr lvl="3"/>
             <a:r>
-              <a:rPr lang="en-US" smtClean="0"/>
+              <a:rPr lang="en-US"/>
               <a:t>Fourth level</a:t>
             </a:r>
           </a:p>
           <a:p>
             <a:pPr lvl="4"/>
             <a:r>
-              <a:rPr lang="en-US" smtClean="0"/>
+              <a:rPr lang="en-US"/>
               <a:t>Fifth level</a:t>
             </a:r>
-            <a:endParaRPr lang="en-US"/>
           </a:p>
         </p:txBody>
       </p:sp>
@@ -819,7 +1822,7 @@
           <a:p>
             <a:fld id="{5BCAD085-E8A6-8845-BD4E-CB4CCA059FC4}" type="datetimeFigureOut">
               <a:rPr lang="en-US" smtClean="0"/>
-              <a:t>1/27/13</a:t>
+              <a:t>6/2/26</a:t>
             </a:fld>
             <a:endParaRPr lang="en-US"/>
           </a:p>
@@ -922,10 +1925,9 @@
           </a:lstStyle>
           <a:p>
             <a:r>
-              <a:rPr lang="en-US" smtClean="0"/>
+              <a:rPr lang="en-US"/>
               <a:t>Click to edit Master title style</a:t>
             </a:r>
-            <a:endParaRPr lang="en-US"/>
           </a:p>
         </p:txBody>
       </p:sp>
@@ -1042,7 +2044,7 @@
           <a:p>
             <a:pPr lvl="0"/>
             <a:r>
-              <a:rPr lang="en-US" smtClean="0"/>
+              <a:rPr lang="en-US"/>
               <a:t>Click to edit Master text styles</a:t>
             </a:r>
           </a:p>
@@ -1065,7 +2067,7 @@
           <a:p>
             <a:fld id="{5BCAD085-E8A6-8845-BD4E-CB4CCA059FC4}" type="datetimeFigureOut">
               <a:rPr lang="en-US" smtClean="0"/>
-              <a:t>1/27/13</a:t>
+              <a:t>6/2/26</a:t>
             </a:fld>
             <a:endParaRPr lang="en-US"/>
           </a:p>
@@ -1159,10 +2161,9 @@
           <a:lstStyle/>
           <a:p>
             <a:r>
-              <a:rPr lang="en-US" smtClean="0"/>
+              <a:rPr lang="en-US"/>
               <a:t>Click to edit Master title style</a:t>
             </a:r>
-            <a:endParaRPr lang="en-US"/>
           </a:p>
         </p:txBody>
       </p:sp>
@@ -1216,38 +2217,37 @@
           <a:p>
             <a:pPr lvl="0"/>
             <a:r>
-              <a:rPr lang="en-US" smtClean="0"/>
+              <a:rPr lang="en-US"/>
               <a:t>Click to edit Master text styles</a:t>
             </a:r>
           </a:p>
           <a:p>
             <a:pPr lvl="1"/>
             <a:r>
-              <a:rPr lang="en-US" smtClean="0"/>
+              <a:rPr lang="en-US"/>
               <a:t>Second level</a:t>
             </a:r>
           </a:p>
           <a:p>
             <a:pPr lvl="2"/>
             <a:r>
-              <a:rPr lang="en-US" smtClean="0"/>
+              <a:rPr lang="en-US"/>
               <a:t>Third level</a:t>
             </a:r>
           </a:p>
           <a:p>
             <a:pPr lvl="3"/>
             <a:r>
-              <a:rPr lang="en-US" smtClean="0"/>
+              <a:rPr lang="en-US"/>
               <a:t>Fourth level</a:t>
             </a:r>
           </a:p>
           <a:p>
             <a:pPr lvl="4"/>
             <a:r>
-              <a:rPr lang="en-US" smtClean="0"/>
+              <a:rPr lang="en-US"/>
               <a:t>Fifth level</a:t>
             </a:r>
-            <a:endParaRPr lang="en-US"/>
           </a:p>
         </p:txBody>
       </p:sp>
@@ -1301,38 +2301,37 @@
           <a:p>
             <a:pPr lvl="0"/>
             <a:r>
-              <a:rPr lang="en-US" smtClean="0"/>
+              <a:rPr lang="en-US"/>
               <a:t>Click to edit Master text styles</a:t>
             </a:r>
           </a:p>
           <a:p>
             <a:pPr lvl="1"/>
             <a:r>
-              <a:rPr lang="en-US" smtClean="0"/>
+              <a:rPr lang="en-US"/>
               <a:t>Second level</a:t>
             </a:r>
           </a:p>
           <a:p>
             <a:pPr lvl="2"/>
             <a:r>
-              <a:rPr lang="en-US" smtClean="0"/>
+              <a:rPr lang="en-US"/>
               <a:t>Third level</a:t>
             </a:r>
           </a:p>
           <a:p>
             <a:pPr lvl="3"/>
             <a:r>
-              <a:rPr lang="en-US" smtClean="0"/>
+              <a:rPr lang="en-US"/>
               <a:t>Fourth level</a:t>
             </a:r>
           </a:p>
           <a:p>
             <a:pPr lvl="4"/>
             <a:r>
-              <a:rPr lang="en-US" smtClean="0"/>
+              <a:rPr lang="en-US"/>
               <a:t>Fifth level</a:t>
             </a:r>
-            <a:endParaRPr lang="en-US"/>
           </a:p>
         </p:txBody>
       </p:sp>
@@ -1353,7 +2352,7 @@
           <a:p>
             <a:fld id="{5BCAD085-E8A6-8845-BD4E-CB4CCA059FC4}" type="datetimeFigureOut">
               <a:rPr lang="en-US" smtClean="0"/>
-              <a:t>1/27/13</a:t>
+              <a:t>6/2/26</a:t>
             </a:fld>
             <a:endParaRPr lang="en-US"/>
           </a:p>
@@ -1451,10 +2450,9 @@
           </a:lstStyle>
           <a:p>
             <a:r>
-              <a:rPr lang="en-US" smtClean="0"/>
+              <a:rPr lang="en-US"/>
               <a:t>Click to edit Master title style</a:t>
             </a:r>
-            <a:endParaRPr lang="en-US"/>
           </a:p>
         </p:txBody>
       </p:sp>
@@ -1517,7 +2515,7 @@
           <a:p>
             <a:pPr lvl="0"/>
             <a:r>
-              <a:rPr lang="en-US" smtClean="0"/>
+              <a:rPr lang="en-US"/>
               <a:t>Click to edit Master text styles</a:t>
             </a:r>
           </a:p>
@@ -1573,38 +2571,37 @@
           <a:p>
             <a:pPr lvl="0"/>
             <a:r>
-              <a:rPr lang="en-US" smtClean="0"/>
+              <a:rPr lang="en-US"/>
               <a:t>Click to edit Master text styles</a:t>
             </a:r>
           </a:p>
           <a:p>
             <a:pPr lvl="1"/>
             <a:r>
-              <a:rPr lang="en-US" smtClean="0"/>
+              <a:rPr lang="en-US"/>
               <a:t>Second level</a:t>
             </a:r>
           </a:p>
           <a:p>
             <a:pPr lvl="2"/>
             <a:r>
-              <a:rPr lang="en-US" smtClean="0"/>
+              <a:rPr lang="en-US"/>
               <a:t>Third level</a:t>
             </a:r>
           </a:p>
           <a:p>
             <a:pPr lvl="3"/>
             <a:r>
-              <a:rPr lang="en-US" smtClean="0"/>
+              <a:rPr lang="en-US"/>
               <a:t>Fourth level</a:t>
             </a:r>
           </a:p>
           <a:p>
             <a:pPr lvl="4"/>
             <a:r>
-              <a:rPr lang="en-US" smtClean="0"/>
+              <a:rPr lang="en-US"/>
               <a:t>Fifth level</a:t>
             </a:r>
-            <a:endParaRPr lang="en-US"/>
           </a:p>
         </p:txBody>
       </p:sp>
@@ -1667,7 +2664,7 @@
           <a:p>
             <a:pPr lvl="0"/>
             <a:r>
-              <a:rPr lang="en-US" smtClean="0"/>
+              <a:rPr lang="en-US"/>
               <a:t>Click to edit Master text styles</a:t>
             </a:r>
           </a:p>
@@ -1723,38 +2720,37 @@
           <a:p>
             <a:pPr lvl="0"/>
             <a:r>
-              <a:rPr lang="en-US" smtClean="0"/>
+              <a:rPr lang="en-US"/>
               <a:t>Click to edit Master text styles</a:t>
             </a:r>
           </a:p>
           <a:p>
             <a:pPr lvl="1"/>
             <a:r>
-              <a:rPr lang="en-US" smtClean="0"/>
+              <a:rPr lang="en-US"/>
               <a:t>Second level</a:t>
             </a:r>
           </a:p>
           <a:p>
             <a:pPr lvl="2"/>
             <a:r>
-              <a:rPr lang="en-US" smtClean="0"/>
+              <a:rPr lang="en-US"/>
               <a:t>Third level</a:t>
             </a:r>
           </a:p>
           <a:p>
             <a:pPr lvl="3"/>
             <a:r>
-              <a:rPr lang="en-US" smtClean="0"/>
+              <a:rPr lang="en-US"/>
               <a:t>Fourth level</a:t>
             </a:r>
           </a:p>
           <a:p>
             <a:pPr lvl="4"/>
             <a:r>
-              <a:rPr lang="en-US" smtClean="0"/>
+              <a:rPr lang="en-US"/>
               <a:t>Fifth level</a:t>
             </a:r>
-            <a:endParaRPr lang="en-US"/>
           </a:p>
         </p:txBody>
       </p:sp>
@@ -1775,7 +2771,7 @@
           <a:p>
             <a:fld id="{5BCAD085-E8A6-8845-BD4E-CB4CCA059FC4}" type="datetimeFigureOut">
               <a:rPr lang="en-US" smtClean="0"/>
-              <a:t>1/27/13</a:t>
+              <a:t>6/2/26</a:t>
             </a:fld>
             <a:endParaRPr lang="en-US"/>
           </a:p>
@@ -1869,10 +2865,9 @@
           <a:lstStyle/>
           <a:p>
             <a:r>
-              <a:rPr lang="en-US" smtClean="0"/>
+              <a:rPr lang="en-US"/>
               <a:t>Click to edit Master title style</a:t>
             </a:r>
-            <a:endParaRPr lang="en-US"/>
           </a:p>
         </p:txBody>
       </p:sp>
@@ -1893,7 +2888,7 @@
           <a:p>
             <a:fld id="{5BCAD085-E8A6-8845-BD4E-CB4CCA059FC4}" type="datetimeFigureOut">
               <a:rPr lang="en-US" smtClean="0"/>
-              <a:t>1/27/13</a:t>
+              <a:t>6/2/26</a:t>
             </a:fld>
             <a:endParaRPr lang="en-US"/>
           </a:p>
@@ -1988,7 +2983,7 @@
           <a:p>
             <a:fld id="{5BCAD085-E8A6-8845-BD4E-CB4CCA059FC4}" type="datetimeFigureOut">
               <a:rPr lang="en-US" smtClean="0"/>
-              <a:t>1/27/13</a:t>
+              <a:t>6/2/26</a:t>
             </a:fld>
             <a:endParaRPr lang="en-US"/>
           </a:p>
@@ -2091,10 +3086,9 @@
           </a:lstStyle>
           <a:p>
             <a:r>
-              <a:rPr lang="en-US" smtClean="0"/>
+              <a:rPr lang="en-US"/>
               <a:t>Click to edit Master title style</a:t>
             </a:r>
-            <a:endParaRPr lang="en-US"/>
           </a:p>
         </p:txBody>
       </p:sp>
@@ -2148,38 +3142,37 @@
           <a:p>
             <a:pPr lvl="0"/>
             <a:r>
-              <a:rPr lang="en-US" smtClean="0"/>
+              <a:rPr lang="en-US"/>
               <a:t>Click to edit Master text styles</a:t>
             </a:r>
           </a:p>
           <a:p>
             <a:pPr lvl="1"/>
             <a:r>
-              <a:rPr lang="en-US" smtClean="0"/>
+              <a:rPr lang="en-US"/>
               <a:t>Second level</a:t>
             </a:r>
           </a:p>
           <a:p>
             <a:pPr lvl="2"/>
             <a:r>
-              <a:rPr lang="en-US" smtClean="0"/>
+              <a:rPr lang="en-US"/>
               <a:t>Third level</a:t>
             </a:r>
           </a:p>
           <a:p>
             <a:pPr lvl="3"/>
             <a:r>
-              <a:rPr lang="en-US" smtClean="0"/>
+              <a:rPr lang="en-US"/>
               <a:t>Fourth level</a:t>
             </a:r>
           </a:p>
           <a:p>
             <a:pPr lvl="4"/>
             <a:r>
-              <a:rPr lang="en-US" smtClean="0"/>
+              <a:rPr lang="en-US"/>
               <a:t>Fifth level</a:t>
             </a:r>
-            <a:endParaRPr lang="en-US"/>
           </a:p>
         </p:txBody>
       </p:sp>
@@ -2242,7 +3235,7 @@
           <a:p>
             <a:pPr lvl="0"/>
             <a:r>
-              <a:rPr lang="en-US" smtClean="0"/>
+              <a:rPr lang="en-US"/>
               <a:t>Click to edit Master text styles</a:t>
             </a:r>
           </a:p>
@@ -2265,7 +3258,7 @@
           <a:p>
             <a:fld id="{5BCAD085-E8A6-8845-BD4E-CB4CCA059FC4}" type="datetimeFigureOut">
               <a:rPr lang="en-US" smtClean="0"/>
-              <a:t>1/27/13</a:t>
+              <a:t>6/2/26</a:t>
             </a:fld>
             <a:endParaRPr lang="en-US"/>
           </a:p>
@@ -2368,10 +3361,9 @@
           </a:lstStyle>
           <a:p>
             <a:r>
-              <a:rPr lang="en-US" smtClean="0"/>
+              <a:rPr lang="en-US"/>
               <a:t>Click to edit Master title style</a:t>
             </a:r>
-            <a:endParaRPr lang="en-US"/>
           </a:p>
         </p:txBody>
       </p:sp>
@@ -2495,7 +3487,7 @@
           <a:p>
             <a:pPr lvl="0"/>
             <a:r>
-              <a:rPr lang="en-US" smtClean="0"/>
+              <a:rPr lang="en-US"/>
               <a:t>Click to edit Master text styles</a:t>
             </a:r>
           </a:p>
@@ -2518,7 +3510,7 @@
           <a:p>
             <a:fld id="{5BCAD085-E8A6-8845-BD4E-CB4CCA059FC4}" type="datetimeFigureOut">
               <a:rPr lang="en-US" smtClean="0"/>
-              <a:t>1/27/13</a:t>
+              <a:t>6/2/26</a:t>
             </a:fld>
             <a:endParaRPr lang="en-US"/>
           </a:p>
@@ -2627,10 +3619,9 @@
           <a:lstStyle/>
           <a:p>
             <a:r>
-              <a:rPr lang="en-US" smtClean="0"/>
+              <a:rPr lang="en-US"/>
               <a:t>Click to edit Master title style</a:t>
             </a:r>
-            <a:endParaRPr lang="en-US"/>
           </a:p>
         </p:txBody>
       </p:sp>
@@ -2661,38 +3652,37 @@
           <a:p>
             <a:pPr lvl="0"/>
             <a:r>
-              <a:rPr lang="en-US" smtClean="0"/>
+              <a:rPr lang="en-US"/>
               <a:t>Click to edit Master text styles</a:t>
             </a:r>
           </a:p>
           <a:p>
             <a:pPr lvl="1"/>
             <a:r>
-              <a:rPr lang="en-US" smtClean="0"/>
+              <a:rPr lang="en-US"/>
               <a:t>Second level</a:t>
             </a:r>
           </a:p>
           <a:p>
             <a:pPr lvl="2"/>
             <a:r>
-              <a:rPr lang="en-US" smtClean="0"/>
+              <a:rPr lang="en-US"/>
               <a:t>Third level</a:t>
             </a:r>
           </a:p>
           <a:p>
             <a:pPr lvl="3"/>
             <a:r>
-              <a:rPr lang="en-US" smtClean="0"/>
+              <a:rPr lang="en-US"/>
               <a:t>Fourth level</a:t>
             </a:r>
           </a:p>
           <a:p>
             <a:pPr lvl="4"/>
             <a:r>
-              <a:rPr lang="en-US" smtClean="0"/>
+              <a:rPr lang="en-US"/>
               <a:t>Fifth level</a:t>
             </a:r>
-            <a:endParaRPr lang="en-US"/>
           </a:p>
         </p:txBody>
       </p:sp>
@@ -2731,7 +3721,7 @@
           <a:p>
             <a:fld id="{5BCAD085-E8A6-8845-BD4E-CB4CCA059FC4}" type="datetimeFigureOut">
               <a:rPr lang="en-US" smtClean="0"/>
-              <a:t>1/27/13</a:t>
+              <a:t>6/2/26</a:t>
             </a:fld>
             <a:endParaRPr lang="en-US"/>
           </a:p>
@@ -3090,7 +4080,7 @@
 </file>
 
 <file path=ppt/slides/slide1.xml><?xml version="1.0" encoding="utf-8"?>
-<p:sld xmlns:a="http://schemas.openxmlformats.org/drawingml/2006/main" xmlns:p="http://schemas.openxmlformats.org/presentationml/2006/main" xmlns:r="http://schemas.openxmlformats.org/officeDocument/2006/relationships">
+<p:sld xmlns:a="http://schemas.openxmlformats.org/drawingml/2006/main" xmlns:r="http://schemas.openxmlformats.org/officeDocument/2006/relationships" xmlns:p="http://schemas.openxmlformats.org/presentationml/2006/main">
   <p:cSld>
     <p:bg>
       <p:bgPr>
@@ -3106,7 +4096,14 @@
         <p:cNvGrpSpPr/>
         <p:nvPr/>
       </p:nvGrpSpPr>
-      <p:grpSpPr/>
+      <p:grpSpPr>
+        <a:xfrm>
+          <a:off x="0" y="0"/>
+          <a:ext cx="0" cy="0"/>
+          <a:chOff x="0" y="0"/>
+          <a:chExt cx="0" cy="0"/>
+        </a:xfrm>
+      </p:grpSpPr>
       <p:sp>
         <p:nvSpPr>
           <p:cNvPr id="2" name="Rectangle 1"/>
@@ -3148,6 +4145,7 @@
           <a:lstStyle/>
           <a:p>
             <a:pPr algn="ctr"/>
+            <a:endParaRPr/>
           </a:p>
         </p:txBody>
       </p:sp>
@@ -3168,7 +4166,7 @@
           <a:noFill/>
         </p:spPr>
         <p:txBody>
-          <a:bodyPr wrap="square" anchor="t" lIns="0" rIns="0" tIns="0" bIns="0">
+          <a:bodyPr wrap="square" lIns="0" tIns="0" rIns="0" bIns="0" anchor="t">
             <a:spAutoFit/>
           </a:bodyPr>
           <a:lstStyle/>
@@ -3203,7 +4201,7 @@
           <a:noFill/>
         </p:spPr>
         <p:txBody>
-          <a:bodyPr wrap="square" anchor="t" lIns="0" rIns="0" tIns="0" bIns="0">
+          <a:bodyPr wrap="square" lIns="0" tIns="0" rIns="0" bIns="0" anchor="t">
             <a:spAutoFit/>
           </a:bodyPr>
           <a:lstStyle/>
@@ -3238,7 +4236,7 @@
           <a:noFill/>
         </p:spPr>
         <p:txBody>
-          <a:bodyPr wrap="square" anchor="t" lIns="0" rIns="0" tIns="0" bIns="0">
+          <a:bodyPr wrap="square" lIns="0" tIns="0" rIns="0" bIns="0" anchor="t">
             <a:spAutoFit/>
           </a:bodyPr>
           <a:lstStyle/>
@@ -3273,7 +4271,7 @@
           <a:noFill/>
         </p:spPr>
         <p:txBody>
-          <a:bodyPr wrap="square" anchor="t" lIns="0" rIns="0" tIns="0" bIns="0">
+          <a:bodyPr wrap="square" lIns="0" tIns="0" rIns="0" bIns="0" anchor="t">
             <a:spAutoFit/>
           </a:bodyPr>
           <a:lstStyle/>
@@ -3332,6 +4330,7 @@
           <a:lstStyle/>
           <a:p>
             <a:pPr algn="ctr"/>
+            <a:endParaRPr/>
           </a:p>
         </p:txBody>
       </p:sp>
@@ -3352,7 +4351,7 @@
           <a:noFill/>
         </p:spPr>
         <p:txBody>
-          <a:bodyPr wrap="square" anchor="t" lIns="0" rIns="0" tIns="0" bIns="0">
+          <a:bodyPr wrap="square" lIns="0" tIns="0" rIns="0" bIns="0" anchor="t">
             <a:spAutoFit/>
           </a:bodyPr>
           <a:lstStyle/>
@@ -3387,7 +4386,7 @@
           <a:noFill/>
         </p:spPr>
         <p:txBody>
-          <a:bodyPr wrap="square" anchor="t" lIns="0" rIns="0" tIns="0" bIns="0">
+          <a:bodyPr wrap="square" lIns="0" tIns="0" rIns="0" bIns="0" anchor="t">
             <a:spAutoFit/>
           </a:bodyPr>
           <a:lstStyle/>
@@ -3414,7 +4413,7 @@
 </file>
 
 <file path=ppt/slides/slide10.xml><?xml version="1.0" encoding="utf-8"?>
-<p:sld xmlns:a="http://schemas.openxmlformats.org/drawingml/2006/main" xmlns:p="http://schemas.openxmlformats.org/presentationml/2006/main" xmlns:r="http://schemas.openxmlformats.org/officeDocument/2006/relationships">
+<p:sld xmlns:a="http://schemas.openxmlformats.org/drawingml/2006/main" xmlns:r="http://schemas.openxmlformats.org/officeDocument/2006/relationships" xmlns:p="http://schemas.openxmlformats.org/presentationml/2006/main">
   <p:cSld>
     <p:bg>
       <p:bgPr>
@@ -3430,7 +4429,14 @@
         <p:cNvGrpSpPr/>
         <p:nvPr/>
       </p:nvGrpSpPr>
-      <p:grpSpPr/>
+      <p:grpSpPr>
+        <a:xfrm>
+          <a:off x="0" y="0"/>
+          <a:ext cx="0" cy="0"/>
+          <a:chOff x="0" y="0"/>
+          <a:chExt cx="0" cy="0"/>
+        </a:xfrm>
+      </p:grpSpPr>
       <p:sp>
         <p:nvSpPr>
           <p:cNvPr id="2" name="TextBox 1"/>
@@ -3448,7 +4454,7 @@
           <a:noFill/>
         </p:spPr>
         <p:txBody>
-          <a:bodyPr wrap="square" anchor="t" lIns="0" rIns="0" tIns="0" bIns="0">
+          <a:bodyPr wrap="square" lIns="0" tIns="0" rIns="0" bIns="0" anchor="t">
             <a:spAutoFit/>
           </a:bodyPr>
           <a:lstStyle/>
@@ -3483,7 +4489,7 @@
           <a:noFill/>
         </p:spPr>
         <p:txBody>
-          <a:bodyPr wrap="square" anchor="t" lIns="0" rIns="0" tIns="0" bIns="0">
+          <a:bodyPr wrap="square" lIns="0" tIns="0" rIns="0" bIns="0" anchor="t">
             <a:spAutoFit/>
           </a:bodyPr>
           <a:lstStyle/>
@@ -3518,7 +4524,7 @@
           <a:noFill/>
         </p:spPr>
         <p:txBody>
-          <a:bodyPr wrap="square" anchor="t" lIns="0" rIns="0" tIns="0" bIns="0">
+          <a:bodyPr wrap="square" lIns="0" tIns="0" rIns="0" bIns="0" anchor="t">
             <a:spAutoFit/>
           </a:bodyPr>
           <a:lstStyle/>
@@ -3577,6 +4583,7 @@
           <a:lstStyle/>
           <a:p>
             <a:pPr algn="ctr"/>
+            <a:endParaRPr/>
           </a:p>
         </p:txBody>
       </p:sp>
@@ -3621,6 +4628,7 @@
           <a:lstStyle/>
           <a:p>
             <a:pPr algn="ctr"/>
+            <a:endParaRPr/>
           </a:p>
         </p:txBody>
       </p:sp>
@@ -3665,6 +4673,7 @@
           <a:lstStyle/>
           <a:p>
             <a:pPr algn="ctr"/>
+            <a:endParaRPr/>
           </a:p>
         </p:txBody>
       </p:sp>
@@ -3685,7 +4694,7 @@
           <a:noFill/>
         </p:spPr>
         <p:txBody>
-          <a:bodyPr wrap="square" anchor="t" lIns="0" rIns="0" tIns="0" bIns="0">
+          <a:bodyPr wrap="square" lIns="0" tIns="0" rIns="0" bIns="0" anchor="t">
             <a:spAutoFit/>
           </a:bodyPr>
           <a:lstStyle/>
@@ -3720,7 +4729,7 @@
           <a:noFill/>
         </p:spPr>
         <p:txBody>
-          <a:bodyPr wrap="square" anchor="t" lIns="0" rIns="0" tIns="0" bIns="0">
+          <a:bodyPr wrap="square" lIns="0" tIns="0" rIns="0" bIns="0" anchor="t">
             <a:spAutoFit/>
           </a:bodyPr>
           <a:lstStyle/>
@@ -3791,6 +4800,7 @@
           <a:lstStyle/>
           <a:p>
             <a:pPr algn="ctr"/>
+            <a:endParaRPr/>
           </a:p>
         </p:txBody>
       </p:sp>
@@ -3811,7 +4821,7 @@
           <a:noFill/>
         </p:spPr>
         <p:txBody>
-          <a:bodyPr wrap="square" anchor="t" lIns="0" rIns="0" tIns="0" bIns="0">
+          <a:bodyPr wrap="square" lIns="0" tIns="0" rIns="0" bIns="0" anchor="t">
             <a:spAutoFit/>
           </a:bodyPr>
           <a:lstStyle/>
@@ -3918,6 +4928,7 @@
           <a:lstStyle/>
           <a:p>
             <a:pPr algn="ctr"/>
+            <a:endParaRPr/>
           </a:p>
         </p:txBody>
       </p:sp>
@@ -3962,6 +4973,7 @@
           <a:lstStyle/>
           <a:p>
             <a:pPr algn="ctr"/>
+            <a:endParaRPr/>
           </a:p>
         </p:txBody>
       </p:sp>
@@ -3982,7 +4994,7 @@
           <a:noFill/>
         </p:spPr>
         <p:txBody>
-          <a:bodyPr wrap="square" anchor="t" lIns="0" rIns="0" tIns="0" bIns="0">
+          <a:bodyPr wrap="square" lIns="0" tIns="0" rIns="0" bIns="0" anchor="t">
             <a:spAutoFit/>
           </a:bodyPr>
           <a:lstStyle/>
@@ -4017,7 +5029,7 @@
           <a:noFill/>
         </p:spPr>
         <p:txBody>
-          <a:bodyPr wrap="square" anchor="t" lIns="0" rIns="0" tIns="0" bIns="0">
+          <a:bodyPr wrap="square" lIns="0" tIns="0" rIns="0" bIns="0" anchor="t">
             <a:spAutoFit/>
           </a:bodyPr>
           <a:lstStyle/>
@@ -4088,6 +5100,7 @@
           <a:lstStyle/>
           <a:p>
             <a:pPr algn="ctr"/>
+            <a:endParaRPr/>
           </a:p>
         </p:txBody>
       </p:sp>
@@ -4108,7 +5121,7 @@
           <a:noFill/>
         </p:spPr>
         <p:txBody>
-          <a:bodyPr wrap="square" anchor="t" lIns="0" rIns="0" tIns="0" bIns="0">
+          <a:bodyPr wrap="square" lIns="0" tIns="0" rIns="0" bIns="0" anchor="t">
             <a:spAutoFit/>
           </a:bodyPr>
           <a:lstStyle/>
@@ -4215,6 +5228,7 @@
           <a:lstStyle/>
           <a:p>
             <a:pPr algn="ctr"/>
+            <a:endParaRPr/>
           </a:p>
         </p:txBody>
       </p:sp>
@@ -4259,6 +5273,7 @@
           <a:lstStyle/>
           <a:p>
             <a:pPr algn="ctr"/>
+            <a:endParaRPr/>
           </a:p>
         </p:txBody>
       </p:sp>
@@ -4279,7 +5294,7 @@
           <a:noFill/>
         </p:spPr>
         <p:txBody>
-          <a:bodyPr wrap="square" anchor="t" lIns="0" rIns="0" tIns="0" bIns="0">
+          <a:bodyPr wrap="square" lIns="0" tIns="0" rIns="0" bIns="0" anchor="t">
             <a:spAutoFit/>
           </a:bodyPr>
           <a:lstStyle/>
@@ -4314,7 +5329,7 @@
           <a:noFill/>
         </p:spPr>
         <p:txBody>
-          <a:bodyPr wrap="square" anchor="t" lIns="0" rIns="0" tIns="0" bIns="0">
+          <a:bodyPr wrap="square" lIns="0" tIns="0" rIns="0" bIns="0" anchor="t">
             <a:spAutoFit/>
           </a:bodyPr>
           <a:lstStyle/>
@@ -4373,6 +5388,7 @@
           <a:lstStyle/>
           <a:p>
             <a:pPr algn="ctr"/>
+            <a:endParaRPr/>
           </a:p>
         </p:txBody>
       </p:sp>
@@ -4393,7 +5409,7 @@
           <a:noFill/>
         </p:spPr>
         <p:txBody>
-          <a:bodyPr wrap="square" anchor="t" lIns="0" rIns="0" tIns="0" bIns="0">
+          <a:bodyPr wrap="square" lIns="0" tIns="0" rIns="0" bIns="0" anchor="t">
             <a:spAutoFit/>
           </a:bodyPr>
           <a:lstStyle/>
@@ -4435,15 +5451,12 @@
           </a:p>
           <a:p>
             <a:pPr algn="l"/>
-            <a:r>
-              <a:rPr sz="1100" b="0">
-                <a:solidFill>
-                  <a:srgbClr val="545655"/>
-                </a:solidFill>
-                <a:latin typeface="Yu Gothic UI"/>
-              </a:rPr>
-              <a:t/>
-            </a:r>
+            <a:endParaRPr sz="1100" b="0">
+              <a:solidFill>
+                <a:srgbClr val="545655"/>
+              </a:solidFill>
+              <a:latin typeface="Yu Gothic UI"/>
+            </a:endParaRPr>
           </a:p>
           <a:p>
             <a:pPr algn="l"/>
@@ -4488,7 +5501,7 @@
           <a:noFill/>
         </p:spPr>
         <p:txBody>
-          <a:bodyPr wrap="square" anchor="t" lIns="0" rIns="0" tIns="0" bIns="0">
+          <a:bodyPr wrap="square" lIns="0" tIns="0" rIns="0" bIns="0" anchor="t">
             <a:spAutoFit/>
           </a:bodyPr>
           <a:lstStyle/>
@@ -4515,7 +5528,7 @@
 </file>
 
 <file path=ppt/slides/slide11.xml><?xml version="1.0" encoding="utf-8"?>
-<p:sld xmlns:a="http://schemas.openxmlformats.org/drawingml/2006/main" xmlns:p="http://schemas.openxmlformats.org/presentationml/2006/main" xmlns:r="http://schemas.openxmlformats.org/officeDocument/2006/relationships">
+<p:sld xmlns:a="http://schemas.openxmlformats.org/drawingml/2006/main" xmlns:r="http://schemas.openxmlformats.org/officeDocument/2006/relationships" xmlns:p="http://schemas.openxmlformats.org/presentationml/2006/main">
   <p:cSld>
     <p:bg>
       <p:bgPr>
@@ -4531,7 +5544,14 @@
         <p:cNvGrpSpPr/>
         <p:nvPr/>
       </p:nvGrpSpPr>
-      <p:grpSpPr/>
+      <p:grpSpPr>
+        <a:xfrm>
+          <a:off x="0" y="0"/>
+          <a:ext cx="0" cy="0"/>
+          <a:chOff x="0" y="0"/>
+          <a:chExt cx="0" cy="0"/>
+        </a:xfrm>
+      </p:grpSpPr>
       <p:sp>
         <p:nvSpPr>
           <p:cNvPr id="2" name="TextBox 1"/>
@@ -4549,7 +5569,7 @@
           <a:noFill/>
         </p:spPr>
         <p:txBody>
-          <a:bodyPr wrap="square" anchor="t" lIns="0" rIns="0" tIns="0" bIns="0">
+          <a:bodyPr wrap="square" lIns="0" tIns="0" rIns="0" bIns="0" anchor="t">
             <a:spAutoFit/>
           </a:bodyPr>
           <a:lstStyle/>
@@ -4584,7 +5604,7 @@
           <a:noFill/>
         </p:spPr>
         <p:txBody>
-          <a:bodyPr wrap="square" anchor="t" lIns="0" rIns="0" tIns="0" bIns="0">
+          <a:bodyPr wrap="square" lIns="0" tIns="0" rIns="0" bIns="0" anchor="t">
             <a:spAutoFit/>
           </a:bodyPr>
           <a:lstStyle/>
@@ -4619,7 +5639,7 @@
           <a:noFill/>
         </p:spPr>
         <p:txBody>
-          <a:bodyPr wrap="square" anchor="t" lIns="0" rIns="0" tIns="0" bIns="0">
+          <a:bodyPr wrap="square" lIns="0" tIns="0" rIns="0" bIns="0" anchor="t">
             <a:spAutoFit/>
           </a:bodyPr>
           <a:lstStyle/>
@@ -4678,6 +5698,7 @@
           <a:lstStyle/>
           <a:p>
             <a:pPr algn="ctr"/>
+            <a:endParaRPr/>
           </a:p>
         </p:txBody>
       </p:sp>
@@ -4722,6 +5743,7 @@
           <a:lstStyle/>
           <a:p>
             <a:pPr algn="ctr"/>
+            <a:endParaRPr/>
           </a:p>
         </p:txBody>
       </p:sp>
@@ -4742,7 +5764,7 @@
           <a:noFill/>
         </p:spPr>
         <p:txBody>
-          <a:bodyPr wrap="square" anchor="t" lIns="0" rIns="0" tIns="0" bIns="0">
+          <a:bodyPr wrap="square" lIns="0" tIns="0" rIns="0" bIns="0" anchor="t">
             <a:spAutoFit/>
           </a:bodyPr>
           <a:lstStyle/>
@@ -4777,7 +5799,7 @@
           <a:noFill/>
         </p:spPr>
         <p:txBody>
-          <a:bodyPr wrap="square" anchor="t" lIns="0" rIns="0" tIns="0" bIns="0">
+          <a:bodyPr wrap="square" lIns="0" tIns="0" rIns="0" bIns="0" anchor="t">
             <a:spAutoFit/>
           </a:bodyPr>
           <a:lstStyle/>
@@ -4836,6 +5858,7 @@
           <a:lstStyle/>
           <a:p>
             <a:pPr algn="ctr"/>
+            <a:endParaRPr/>
           </a:p>
         </p:txBody>
       </p:sp>
@@ -4856,7 +5879,7 @@
           <a:noFill/>
         </p:spPr>
         <p:txBody>
-          <a:bodyPr wrap="square" anchor="t" lIns="0" rIns="0" tIns="0" bIns="0">
+          <a:bodyPr wrap="square" lIns="0" tIns="0" rIns="0" bIns="0" anchor="t">
             <a:spAutoFit/>
           </a:bodyPr>
           <a:lstStyle/>
@@ -4891,7 +5914,7 @@
           <a:noFill/>
         </p:spPr>
         <p:txBody>
-          <a:bodyPr wrap="square" anchor="t" lIns="0" rIns="0" tIns="0" bIns="0">
+          <a:bodyPr wrap="square" lIns="0" tIns="0" rIns="0" bIns="0" anchor="t">
             <a:spAutoFit/>
           </a:bodyPr>
           <a:lstStyle/>
@@ -4950,6 +5973,7 @@
           <a:lstStyle/>
           <a:p>
             <a:pPr algn="ctr"/>
+            <a:endParaRPr/>
           </a:p>
         </p:txBody>
       </p:sp>
@@ -4970,7 +5994,7 @@
           <a:noFill/>
         </p:spPr>
         <p:txBody>
-          <a:bodyPr wrap="square" anchor="t" lIns="0" rIns="0" tIns="0" bIns="0">
+          <a:bodyPr wrap="square" lIns="0" tIns="0" rIns="0" bIns="0" anchor="t">
             <a:spAutoFit/>
           </a:bodyPr>
           <a:lstStyle/>
@@ -5005,7 +6029,7 @@
           <a:noFill/>
         </p:spPr>
         <p:txBody>
-          <a:bodyPr wrap="square" anchor="t" lIns="0" rIns="0" tIns="0" bIns="0">
+          <a:bodyPr wrap="square" lIns="0" tIns="0" rIns="0" bIns="0" anchor="t">
             <a:spAutoFit/>
           </a:bodyPr>
           <a:lstStyle/>
@@ -5064,6 +6088,7 @@
           <a:lstStyle/>
           <a:p>
             <a:pPr algn="ctr"/>
+            <a:endParaRPr/>
           </a:p>
         </p:txBody>
       </p:sp>
@@ -5084,7 +6109,7 @@
           <a:noFill/>
         </p:spPr>
         <p:txBody>
-          <a:bodyPr wrap="square" anchor="t" lIns="0" rIns="0" tIns="0" bIns="0">
+          <a:bodyPr wrap="square" lIns="0" tIns="0" rIns="0" bIns="0" anchor="t">
             <a:spAutoFit/>
           </a:bodyPr>
           <a:lstStyle/>
@@ -5119,7 +6144,7 @@
           <a:noFill/>
         </p:spPr>
         <p:txBody>
-          <a:bodyPr wrap="square" anchor="t" lIns="0" rIns="0" tIns="0" bIns="0">
+          <a:bodyPr wrap="square" lIns="0" tIns="0" rIns="0" bIns="0" anchor="t">
             <a:spAutoFit/>
           </a:bodyPr>
           <a:lstStyle/>
@@ -5178,6 +6203,7 @@
           <a:lstStyle/>
           <a:p>
             <a:pPr algn="ctr"/>
+            <a:endParaRPr/>
           </a:p>
         </p:txBody>
       </p:sp>
@@ -5198,7 +6224,7 @@
           <a:noFill/>
         </p:spPr>
         <p:txBody>
-          <a:bodyPr wrap="square" anchor="t" lIns="0" rIns="0" tIns="0" bIns="0">
+          <a:bodyPr wrap="square" lIns="0" tIns="0" rIns="0" bIns="0" anchor="t">
             <a:spAutoFit/>
           </a:bodyPr>
           <a:lstStyle/>
@@ -5233,7 +6259,7 @@
           <a:noFill/>
         </p:spPr>
         <p:txBody>
-          <a:bodyPr wrap="square" anchor="t" lIns="0" rIns="0" tIns="0" bIns="0">
+          <a:bodyPr wrap="square" lIns="0" tIns="0" rIns="0" bIns="0" anchor="t">
             <a:spAutoFit/>
           </a:bodyPr>
           <a:lstStyle/>
@@ -5292,6 +6318,7 @@
           <a:lstStyle/>
           <a:p>
             <a:pPr algn="ctr"/>
+            <a:endParaRPr/>
           </a:p>
         </p:txBody>
       </p:sp>
@@ -5312,7 +6339,7 @@
           <a:noFill/>
         </p:spPr>
         <p:txBody>
-          <a:bodyPr wrap="square" anchor="t" lIns="0" rIns="0" tIns="0" bIns="0">
+          <a:bodyPr wrap="square" lIns="0" tIns="0" rIns="0" bIns="0" anchor="t">
             <a:spAutoFit/>
           </a:bodyPr>
           <a:lstStyle/>
@@ -5347,7 +6374,7 @@
           <a:noFill/>
         </p:spPr>
         <p:txBody>
-          <a:bodyPr wrap="square" anchor="t" lIns="0" rIns="0" tIns="0" bIns="0">
+          <a:bodyPr wrap="square" lIns="0" tIns="0" rIns="0" bIns="0" anchor="t">
             <a:spAutoFit/>
           </a:bodyPr>
           <a:lstStyle/>
@@ -5406,6 +6433,7 @@
           <a:lstStyle/>
           <a:p>
             <a:pPr algn="ctr"/>
+            <a:endParaRPr/>
           </a:p>
         </p:txBody>
       </p:sp>
@@ -5426,7 +6454,7 @@
           <a:noFill/>
         </p:spPr>
         <p:txBody>
-          <a:bodyPr wrap="square" anchor="t" lIns="0" rIns="0" tIns="0" bIns="0">
+          <a:bodyPr wrap="square" lIns="0" tIns="0" rIns="0" bIns="0" anchor="t">
             <a:spAutoFit/>
           </a:bodyPr>
           <a:lstStyle/>
@@ -5461,7 +6489,7 @@
           <a:noFill/>
         </p:spPr>
         <p:txBody>
-          <a:bodyPr wrap="square" anchor="t" lIns="0" rIns="0" tIns="0" bIns="0">
+          <a:bodyPr wrap="square" lIns="0" tIns="0" rIns="0" bIns="0" anchor="t">
             <a:spAutoFit/>
           </a:bodyPr>
           <a:lstStyle/>
@@ -5496,7 +6524,7 @@
           <a:noFill/>
         </p:spPr>
         <p:txBody>
-          <a:bodyPr wrap="square" anchor="t" lIns="0" rIns="0" tIns="0" bIns="0">
+          <a:bodyPr wrap="square" lIns="0" tIns="0" rIns="0" bIns="0" anchor="t">
             <a:spAutoFit/>
           </a:bodyPr>
           <a:lstStyle/>
@@ -5555,6 +6583,7 @@
           <a:lstStyle/>
           <a:p>
             <a:pPr algn="ctr"/>
+            <a:endParaRPr/>
           </a:p>
         </p:txBody>
       </p:sp>
@@ -5575,7 +6604,7 @@
           <a:noFill/>
         </p:spPr>
         <p:txBody>
-          <a:bodyPr wrap="square" anchor="t" lIns="0" rIns="0" tIns="0" bIns="0">
+          <a:bodyPr wrap="square" lIns="0" tIns="0" rIns="0" bIns="0" anchor="t">
             <a:spAutoFit/>
           </a:bodyPr>
           <a:lstStyle/>
@@ -5610,7 +6639,7 @@
           <a:noFill/>
         </p:spPr>
         <p:txBody>
-          <a:bodyPr wrap="square" anchor="t" lIns="0" rIns="0" tIns="0" bIns="0">
+          <a:bodyPr wrap="square" lIns="0" tIns="0" rIns="0" bIns="0" anchor="t">
             <a:spAutoFit/>
           </a:bodyPr>
           <a:lstStyle/>
@@ -5645,7 +6674,7 @@
           <a:noFill/>
         </p:spPr>
         <p:txBody>
-          <a:bodyPr wrap="square" anchor="t" lIns="0" rIns="0" tIns="0" bIns="0">
+          <a:bodyPr wrap="square" lIns="0" tIns="0" rIns="0" bIns="0" anchor="t">
             <a:spAutoFit/>
           </a:bodyPr>
           <a:lstStyle/>
@@ -5704,6 +6733,7 @@
           <a:lstStyle/>
           <a:p>
             <a:pPr algn="ctr"/>
+            <a:endParaRPr/>
           </a:p>
         </p:txBody>
       </p:sp>
@@ -5724,7 +6754,7 @@
           <a:noFill/>
         </p:spPr>
         <p:txBody>
-          <a:bodyPr wrap="square" anchor="t" lIns="0" rIns="0" tIns="0" bIns="0">
+          <a:bodyPr wrap="square" lIns="0" tIns="0" rIns="0" bIns="0" anchor="t">
             <a:spAutoFit/>
           </a:bodyPr>
           <a:lstStyle/>
@@ -5759,7 +6789,7 @@
           <a:noFill/>
         </p:spPr>
         <p:txBody>
-          <a:bodyPr wrap="square" anchor="t" lIns="0" rIns="0" tIns="0" bIns="0">
+          <a:bodyPr wrap="square" lIns="0" tIns="0" rIns="0" bIns="0" anchor="t">
             <a:spAutoFit/>
           </a:bodyPr>
           <a:lstStyle/>
@@ -5794,7 +6824,7 @@
           <a:noFill/>
         </p:spPr>
         <p:txBody>
-          <a:bodyPr wrap="square" anchor="t" lIns="0" rIns="0" tIns="0" bIns="0">
+          <a:bodyPr wrap="square" lIns="0" tIns="0" rIns="0" bIns="0" anchor="t">
             <a:spAutoFit/>
           </a:bodyPr>
           <a:lstStyle/>
@@ -5853,6 +6883,7 @@
           <a:lstStyle/>
           <a:p>
             <a:pPr algn="ctr"/>
+            <a:endParaRPr/>
           </a:p>
         </p:txBody>
       </p:sp>
@@ -5873,7 +6904,7 @@
           <a:noFill/>
         </p:spPr>
         <p:txBody>
-          <a:bodyPr wrap="square" anchor="t" lIns="0" rIns="0" tIns="0" bIns="0">
+          <a:bodyPr wrap="square" lIns="0" tIns="0" rIns="0" bIns="0" anchor="t">
             <a:spAutoFit/>
           </a:bodyPr>
           <a:lstStyle/>
@@ -5908,7 +6939,7 @@
           <a:noFill/>
         </p:spPr>
         <p:txBody>
-          <a:bodyPr wrap="square" anchor="t" lIns="0" rIns="0" tIns="0" bIns="0">
+          <a:bodyPr wrap="square" lIns="0" tIns="0" rIns="0" bIns="0" anchor="t">
             <a:spAutoFit/>
           </a:bodyPr>
           <a:lstStyle/>
@@ -5943,7 +6974,7 @@
           <a:noFill/>
         </p:spPr>
         <p:txBody>
-          <a:bodyPr wrap="square" anchor="t" lIns="0" rIns="0" tIns="0" bIns="0">
+          <a:bodyPr wrap="square" lIns="0" tIns="0" rIns="0" bIns="0" anchor="t">
             <a:spAutoFit/>
           </a:bodyPr>
           <a:lstStyle/>
@@ -5978,7 +7009,7 @@
           <a:noFill/>
         </p:spPr>
         <p:txBody>
-          <a:bodyPr wrap="square" anchor="t" lIns="0" rIns="0" tIns="0" bIns="0">
+          <a:bodyPr wrap="square" lIns="0" tIns="0" rIns="0" bIns="0" anchor="t">
             <a:spAutoFit/>
           </a:bodyPr>
           <a:lstStyle/>
@@ -6005,7 +7036,7 @@
 </file>
 
 <file path=ppt/slides/slide12.xml><?xml version="1.0" encoding="utf-8"?>
-<p:sld xmlns:a="http://schemas.openxmlformats.org/drawingml/2006/main" xmlns:p="http://schemas.openxmlformats.org/presentationml/2006/main" xmlns:r="http://schemas.openxmlformats.org/officeDocument/2006/relationships">
+<p:sld xmlns:a="http://schemas.openxmlformats.org/drawingml/2006/main" xmlns:r="http://schemas.openxmlformats.org/officeDocument/2006/relationships" xmlns:p="http://schemas.openxmlformats.org/presentationml/2006/main">
   <p:cSld>
     <p:bg>
       <p:bgPr>
@@ -6021,7 +7052,14 @@
         <p:cNvGrpSpPr/>
         <p:nvPr/>
       </p:nvGrpSpPr>
-      <p:grpSpPr/>
+      <p:grpSpPr>
+        <a:xfrm>
+          <a:off x="0" y="0"/>
+          <a:ext cx="0" cy="0"/>
+          <a:chOff x="0" y="0"/>
+          <a:chExt cx="0" cy="0"/>
+        </a:xfrm>
+      </p:grpSpPr>
       <p:sp>
         <p:nvSpPr>
           <p:cNvPr id="2" name="Rectangle 1"/>
@@ -6063,6 +7101,7 @@
           <a:lstStyle/>
           <a:p>
             <a:pPr algn="ctr"/>
+            <a:endParaRPr/>
           </a:p>
         </p:txBody>
       </p:sp>
@@ -6107,6 +7146,7 @@
           <a:lstStyle/>
           <a:p>
             <a:pPr algn="ctr"/>
+            <a:endParaRPr/>
           </a:p>
         </p:txBody>
       </p:sp>
@@ -6127,7 +7167,7 @@
           <a:noFill/>
         </p:spPr>
         <p:txBody>
-          <a:bodyPr wrap="square" anchor="t" lIns="0" rIns="0" tIns="0" bIns="0">
+          <a:bodyPr wrap="square" lIns="0" tIns="0" rIns="0" bIns="0" anchor="t">
             <a:spAutoFit/>
           </a:bodyPr>
           <a:lstStyle/>
@@ -6162,7 +7202,7 @@
           <a:noFill/>
         </p:spPr>
         <p:txBody>
-          <a:bodyPr wrap="square" anchor="t" lIns="0" rIns="0" tIns="0" bIns="0">
+          <a:bodyPr wrap="square" lIns="0" tIns="0" rIns="0" bIns="0" anchor="t">
             <a:spAutoFit/>
           </a:bodyPr>
           <a:lstStyle/>
@@ -6197,7 +7237,7 @@
           <a:noFill/>
         </p:spPr>
         <p:txBody>
-          <a:bodyPr wrap="square" anchor="t" lIns="0" rIns="0" tIns="0" bIns="0">
+          <a:bodyPr wrap="square" lIns="0" tIns="0" rIns="0" bIns="0" anchor="t">
             <a:spAutoFit/>
           </a:bodyPr>
           <a:lstStyle/>
@@ -6232,7 +7272,7 @@
           <a:noFill/>
         </p:spPr>
         <p:txBody>
-          <a:bodyPr wrap="square" anchor="t" lIns="0" rIns="0" tIns="0" bIns="0">
+          <a:bodyPr wrap="square" lIns="0" tIns="0" rIns="0" bIns="0" anchor="t">
             <a:spAutoFit/>
           </a:bodyPr>
           <a:lstStyle/>
@@ -6267,7 +7307,7 @@
           <a:noFill/>
         </p:spPr>
         <p:txBody>
-          <a:bodyPr wrap="square" anchor="t" lIns="0" rIns="0" tIns="0" bIns="0">
+          <a:bodyPr wrap="square" lIns="0" tIns="0" rIns="0" bIns="0" anchor="t">
             <a:spAutoFit/>
           </a:bodyPr>
           <a:lstStyle/>
@@ -6302,7 +7342,7 @@
           <a:noFill/>
         </p:spPr>
         <p:txBody>
-          <a:bodyPr wrap="square" anchor="t" lIns="0" rIns="0" tIns="0" bIns="0">
+          <a:bodyPr wrap="square" lIns="0" tIns="0" rIns="0" bIns="0" anchor="t">
             <a:spAutoFit/>
           </a:bodyPr>
           <a:lstStyle/>
@@ -6337,7 +7377,7 @@
           <a:noFill/>
         </p:spPr>
         <p:txBody>
-          <a:bodyPr wrap="square" anchor="t" lIns="0" rIns="0" tIns="0" bIns="0">
+          <a:bodyPr wrap="square" lIns="0" tIns="0" rIns="0" bIns="0" anchor="t">
             <a:spAutoFit/>
           </a:bodyPr>
           <a:lstStyle/>
@@ -6396,6 +7436,7 @@
           <a:lstStyle/>
           <a:p>
             <a:pPr algn="ctr"/>
+            <a:endParaRPr/>
           </a:p>
         </p:txBody>
       </p:sp>
@@ -6416,7 +7457,7 @@
           <a:noFill/>
         </p:spPr>
         <p:txBody>
-          <a:bodyPr wrap="square" anchor="t" lIns="0" rIns="0" tIns="0" bIns="0">
+          <a:bodyPr wrap="square" lIns="0" tIns="0" rIns="0" bIns="0" anchor="t">
             <a:spAutoFit/>
           </a:bodyPr>
           <a:lstStyle/>
@@ -6451,7 +7492,7 @@
           <a:noFill/>
         </p:spPr>
         <p:txBody>
-          <a:bodyPr wrap="square" anchor="t" lIns="0" rIns="0" tIns="0" bIns="0">
+          <a:bodyPr wrap="square" lIns="0" tIns="0" rIns="0" bIns="0" anchor="t">
             <a:spAutoFit/>
           </a:bodyPr>
           <a:lstStyle/>
@@ -6486,7 +7527,7 @@
           <a:noFill/>
         </p:spPr>
         <p:txBody>
-          <a:bodyPr wrap="square" anchor="t" lIns="0" rIns="0" tIns="0" bIns="0">
+          <a:bodyPr wrap="square" lIns="0" tIns="0" rIns="0" bIns="0" anchor="t">
             <a:spAutoFit/>
           </a:bodyPr>
           <a:lstStyle/>
@@ -6513,7 +7554,7 @@
 </file>
 
 <file path=ppt/slides/slide2.xml><?xml version="1.0" encoding="utf-8"?>
-<p:sld xmlns:a="http://schemas.openxmlformats.org/drawingml/2006/main" xmlns:p="http://schemas.openxmlformats.org/presentationml/2006/main" xmlns:r="http://schemas.openxmlformats.org/officeDocument/2006/relationships">
+<p:sld xmlns:a="http://schemas.openxmlformats.org/drawingml/2006/main" xmlns:r="http://schemas.openxmlformats.org/officeDocument/2006/relationships" xmlns:p="http://schemas.openxmlformats.org/presentationml/2006/main">
   <p:cSld>
     <p:bg>
       <p:bgPr>
@@ -6529,7 +7570,14 @@
         <p:cNvGrpSpPr/>
         <p:nvPr/>
       </p:nvGrpSpPr>
-      <p:grpSpPr/>
+      <p:grpSpPr>
+        <a:xfrm>
+          <a:off x="0" y="0"/>
+          <a:ext cx="0" cy="0"/>
+          <a:chOff x="0" y="0"/>
+          <a:chExt cx="0" cy="0"/>
+        </a:xfrm>
+      </p:grpSpPr>
       <p:sp>
         <p:nvSpPr>
           <p:cNvPr id="2" name="Right Triangle 1"/>
@@ -6571,6 +7619,7 @@
           <a:lstStyle/>
           <a:p>
             <a:pPr algn="ctr"/>
+            <a:endParaRPr/>
           </a:p>
         </p:txBody>
       </p:sp>
@@ -6591,7 +7640,7 @@
           <a:noFill/>
         </p:spPr>
         <p:txBody>
-          <a:bodyPr wrap="square" anchor="t" lIns="0" rIns="0" tIns="0" bIns="0">
+          <a:bodyPr wrap="square" lIns="0" tIns="0" rIns="0" bIns="0" anchor="t">
             <a:spAutoFit/>
           </a:bodyPr>
           <a:lstStyle/>
@@ -6626,7 +7675,7 @@
           <a:noFill/>
         </p:spPr>
         <p:txBody>
-          <a:bodyPr wrap="square" anchor="t" lIns="0" rIns="0" tIns="0" bIns="0">
+          <a:bodyPr wrap="square" lIns="0" tIns="0" rIns="0" bIns="0" anchor="t">
             <a:spAutoFit/>
           </a:bodyPr>
           <a:lstStyle/>
@@ -6661,7 +7710,7 @@
           <a:noFill/>
         </p:spPr>
         <p:txBody>
-          <a:bodyPr wrap="square" anchor="t" lIns="0" rIns="0" tIns="0" bIns="0">
+          <a:bodyPr wrap="square" lIns="0" tIns="0" rIns="0" bIns="0" anchor="t">
             <a:spAutoFit/>
           </a:bodyPr>
           <a:lstStyle/>
@@ -6696,7 +7745,7 @@
           <a:noFill/>
         </p:spPr>
         <p:txBody>
-          <a:bodyPr wrap="square" anchor="t" lIns="0" rIns="0" tIns="0" bIns="0">
+          <a:bodyPr wrap="square" lIns="0" tIns="0" rIns="0" bIns="0" anchor="t">
             <a:spAutoFit/>
           </a:bodyPr>
           <a:lstStyle/>
@@ -6731,7 +7780,7 @@
           <a:noFill/>
         </p:spPr>
         <p:txBody>
-          <a:bodyPr wrap="square" anchor="t" lIns="0" rIns="0" tIns="0" bIns="0">
+          <a:bodyPr wrap="square" lIns="0" tIns="0" rIns="0" bIns="0" anchor="t">
             <a:spAutoFit/>
           </a:bodyPr>
           <a:lstStyle/>
@@ -6790,6 +7839,7 @@
           <a:lstStyle/>
           <a:p>
             <a:pPr algn="ctr"/>
+            <a:endParaRPr/>
           </a:p>
         </p:txBody>
       </p:sp>
@@ -6810,7 +7860,7 @@
           <a:noFill/>
         </p:spPr>
         <p:txBody>
-          <a:bodyPr wrap="square" anchor="t" lIns="0" rIns="0" tIns="0" bIns="0">
+          <a:bodyPr wrap="square" lIns="0" tIns="0" rIns="0" bIns="0" anchor="t">
             <a:spAutoFit/>
           </a:bodyPr>
           <a:lstStyle/>
@@ -6845,7 +7895,7 @@
           <a:noFill/>
         </p:spPr>
         <p:txBody>
-          <a:bodyPr wrap="square" anchor="t" lIns="0" rIns="0" tIns="0" bIns="0">
+          <a:bodyPr wrap="square" lIns="0" tIns="0" rIns="0" bIns="0" anchor="t">
             <a:spAutoFit/>
           </a:bodyPr>
           <a:lstStyle/>
@@ -6872,7 +7922,7 @@
 </file>
 
 <file path=ppt/slides/slide3.xml><?xml version="1.0" encoding="utf-8"?>
-<p:sld xmlns:a="http://schemas.openxmlformats.org/drawingml/2006/main" xmlns:p="http://schemas.openxmlformats.org/presentationml/2006/main" xmlns:r="http://schemas.openxmlformats.org/officeDocument/2006/relationships">
+<p:sld xmlns:a="http://schemas.openxmlformats.org/drawingml/2006/main" xmlns:r="http://schemas.openxmlformats.org/officeDocument/2006/relationships" xmlns:p="http://schemas.openxmlformats.org/presentationml/2006/main">
   <p:cSld>
     <p:bg>
       <p:bgPr>
@@ -6888,7 +7938,14 @@
         <p:cNvGrpSpPr/>
         <p:nvPr/>
       </p:nvGrpSpPr>
-      <p:grpSpPr/>
+      <p:grpSpPr>
+        <a:xfrm>
+          <a:off x="0" y="0"/>
+          <a:ext cx="0" cy="0"/>
+          <a:chOff x="0" y="0"/>
+          <a:chExt cx="0" cy="0"/>
+        </a:xfrm>
+      </p:grpSpPr>
       <p:sp>
         <p:nvSpPr>
           <p:cNvPr id="2" name="TextBox 1"/>
@@ -6906,7 +7963,7 @@
           <a:noFill/>
         </p:spPr>
         <p:txBody>
-          <a:bodyPr wrap="square" anchor="t" lIns="0" rIns="0" tIns="0" bIns="0">
+          <a:bodyPr wrap="square" lIns="0" tIns="0" rIns="0" bIns="0" anchor="t">
             <a:spAutoFit/>
           </a:bodyPr>
           <a:lstStyle/>
@@ -6941,7 +7998,7 @@
           <a:noFill/>
         </p:spPr>
         <p:txBody>
-          <a:bodyPr wrap="square" anchor="t" lIns="0" rIns="0" tIns="0" bIns="0">
+          <a:bodyPr wrap="square" lIns="0" tIns="0" rIns="0" bIns="0" anchor="t">
             <a:spAutoFit/>
           </a:bodyPr>
           <a:lstStyle/>
@@ -7000,6 +8057,7 @@
           <a:lstStyle/>
           <a:p>
             <a:pPr algn="ctr"/>
+            <a:endParaRPr/>
           </a:p>
         </p:txBody>
       </p:sp>
@@ -7044,6 +8102,7 @@
           <a:lstStyle/>
           <a:p>
             <a:pPr algn="ctr"/>
+            <a:endParaRPr/>
           </a:p>
         </p:txBody>
       </p:sp>
@@ -7088,6 +8147,7 @@
           <a:lstStyle/>
           <a:p>
             <a:pPr algn="ctr"/>
+            <a:endParaRPr/>
           </a:p>
         </p:txBody>
       </p:sp>
@@ -7108,7 +8168,7 @@
           <a:noFill/>
         </p:spPr>
         <p:txBody>
-          <a:bodyPr wrap="square" anchor="t" lIns="0" rIns="0" tIns="0" bIns="0">
+          <a:bodyPr wrap="square" lIns="0" tIns="0" rIns="0" bIns="0" anchor="t">
             <a:spAutoFit/>
           </a:bodyPr>
           <a:lstStyle/>
@@ -7143,7 +8203,7 @@
           <a:noFill/>
         </p:spPr>
         <p:txBody>
-          <a:bodyPr wrap="square" anchor="t" lIns="0" rIns="0" tIns="0" bIns="0">
+          <a:bodyPr wrap="square" lIns="0" tIns="0" rIns="0" bIns="0" anchor="t">
             <a:spAutoFit/>
           </a:bodyPr>
           <a:lstStyle/>
@@ -7202,6 +8262,7 @@
           <a:lstStyle/>
           <a:p>
             <a:pPr algn="ctr"/>
+            <a:endParaRPr/>
           </a:p>
         </p:txBody>
       </p:sp>
@@ -7222,7 +8283,7 @@
           <a:noFill/>
         </p:spPr>
         <p:txBody>
-          <a:bodyPr wrap="square" anchor="t" lIns="0" rIns="0" tIns="0" bIns="0">
+          <a:bodyPr wrap="square" lIns="0" tIns="0" rIns="0" bIns="0" anchor="t">
             <a:spAutoFit/>
           </a:bodyPr>
           <a:lstStyle/>
@@ -7305,6 +8366,7 @@
           <a:lstStyle/>
           <a:p>
             <a:pPr algn="ctr"/>
+            <a:endParaRPr/>
           </a:p>
         </p:txBody>
       </p:sp>
@@ -7349,6 +8411,7 @@
           <a:lstStyle/>
           <a:p>
             <a:pPr algn="ctr"/>
+            <a:endParaRPr/>
           </a:p>
         </p:txBody>
       </p:sp>
@@ -7369,7 +8432,7 @@
           <a:noFill/>
         </p:spPr>
         <p:txBody>
-          <a:bodyPr wrap="square" anchor="t" lIns="0" rIns="0" tIns="0" bIns="0">
+          <a:bodyPr wrap="square" lIns="0" tIns="0" rIns="0" bIns="0" anchor="t">
             <a:spAutoFit/>
           </a:bodyPr>
           <a:lstStyle/>
@@ -7404,7 +8467,7 @@
           <a:noFill/>
         </p:spPr>
         <p:txBody>
-          <a:bodyPr wrap="square" anchor="t" lIns="0" rIns="0" tIns="0" bIns="0">
+          <a:bodyPr wrap="square" lIns="0" tIns="0" rIns="0" bIns="0" anchor="t">
             <a:spAutoFit/>
           </a:bodyPr>
           <a:lstStyle/>
@@ -7463,6 +8526,7 @@
           <a:lstStyle/>
           <a:p>
             <a:pPr algn="ctr"/>
+            <a:endParaRPr/>
           </a:p>
         </p:txBody>
       </p:sp>
@@ -7483,7 +8547,7 @@
           <a:noFill/>
         </p:spPr>
         <p:txBody>
-          <a:bodyPr wrap="square" anchor="t" lIns="0" rIns="0" tIns="0" bIns="0">
+          <a:bodyPr wrap="square" lIns="0" tIns="0" rIns="0" bIns="0" anchor="t">
             <a:spAutoFit/>
           </a:bodyPr>
           <a:lstStyle/>
@@ -7566,6 +8630,7 @@
           <a:lstStyle/>
           <a:p>
             <a:pPr algn="ctr"/>
+            <a:endParaRPr/>
           </a:p>
         </p:txBody>
       </p:sp>
@@ -7610,6 +8675,7 @@
           <a:lstStyle/>
           <a:p>
             <a:pPr algn="ctr"/>
+            <a:endParaRPr/>
           </a:p>
         </p:txBody>
       </p:sp>
@@ -7630,7 +8696,7 @@
           <a:noFill/>
         </p:spPr>
         <p:txBody>
-          <a:bodyPr wrap="square" anchor="t" lIns="0" rIns="0" tIns="0" bIns="0">
+          <a:bodyPr wrap="square" lIns="0" tIns="0" rIns="0" bIns="0" anchor="t">
             <a:spAutoFit/>
           </a:bodyPr>
           <a:lstStyle/>
@@ -7665,7 +8731,7 @@
           <a:noFill/>
         </p:spPr>
         <p:txBody>
-          <a:bodyPr wrap="square" anchor="t" lIns="0" rIns="0" tIns="0" bIns="0">
+          <a:bodyPr wrap="square" lIns="0" tIns="0" rIns="0" bIns="0" anchor="t">
             <a:spAutoFit/>
           </a:bodyPr>
           <a:lstStyle/>
@@ -7724,6 +8790,7 @@
           <a:lstStyle/>
           <a:p>
             <a:pPr algn="ctr"/>
+            <a:endParaRPr/>
           </a:p>
         </p:txBody>
       </p:sp>
@@ -7744,7 +8811,7 @@
           <a:noFill/>
         </p:spPr>
         <p:txBody>
-          <a:bodyPr wrap="square" anchor="t" lIns="0" rIns="0" tIns="0" bIns="0">
+          <a:bodyPr wrap="square" lIns="0" tIns="0" rIns="0" bIns="0" anchor="t">
             <a:spAutoFit/>
           </a:bodyPr>
           <a:lstStyle/>
@@ -7803,7 +8870,7 @@
           <a:noFill/>
         </p:spPr>
         <p:txBody>
-          <a:bodyPr wrap="square" anchor="t" lIns="0" rIns="0" tIns="0" bIns="0">
+          <a:bodyPr wrap="square" lIns="0" tIns="0" rIns="0" bIns="0" anchor="t">
             <a:spAutoFit/>
           </a:bodyPr>
           <a:lstStyle/>
@@ -7830,7 +8897,7 @@
 </file>
 
 <file path=ppt/slides/slide4.xml><?xml version="1.0" encoding="utf-8"?>
-<p:sld xmlns:a="http://schemas.openxmlformats.org/drawingml/2006/main" xmlns:p="http://schemas.openxmlformats.org/presentationml/2006/main" xmlns:r="http://schemas.openxmlformats.org/officeDocument/2006/relationships">
+<p:sld xmlns:a="http://schemas.openxmlformats.org/drawingml/2006/main" xmlns:r="http://schemas.openxmlformats.org/officeDocument/2006/relationships" xmlns:p="http://schemas.openxmlformats.org/presentationml/2006/main">
   <p:cSld>
     <p:bg>
       <p:bgPr>
@@ -7846,7 +8913,14 @@
         <p:cNvGrpSpPr/>
         <p:nvPr/>
       </p:nvGrpSpPr>
-      <p:grpSpPr/>
+      <p:grpSpPr>
+        <a:xfrm>
+          <a:off x="0" y="0"/>
+          <a:ext cx="0" cy="0"/>
+          <a:chOff x="0" y="0"/>
+          <a:chExt cx="0" cy="0"/>
+        </a:xfrm>
+      </p:grpSpPr>
       <p:sp>
         <p:nvSpPr>
           <p:cNvPr id="2" name="Rectangle 1"/>
@@ -7888,6 +8962,7 @@
           <a:lstStyle/>
           <a:p>
             <a:pPr algn="ctr"/>
+            <a:endParaRPr/>
           </a:p>
         </p:txBody>
       </p:sp>
@@ -7908,7 +8983,7 @@
           <a:noFill/>
         </p:spPr>
         <p:txBody>
-          <a:bodyPr wrap="square" anchor="t" lIns="0" rIns="0" tIns="0" bIns="0">
+          <a:bodyPr wrap="square" lIns="0" tIns="0" rIns="0" bIns="0" anchor="t">
             <a:spAutoFit/>
           </a:bodyPr>
           <a:lstStyle/>
@@ -7943,7 +9018,7 @@
           <a:noFill/>
         </p:spPr>
         <p:txBody>
-          <a:bodyPr wrap="square" anchor="t" lIns="0" rIns="0" tIns="0" bIns="0">
+          <a:bodyPr wrap="square" lIns="0" tIns="0" rIns="0" bIns="0" anchor="t">
             <a:spAutoFit/>
           </a:bodyPr>
           <a:lstStyle/>
@@ -7978,7 +9053,7 @@
           <a:noFill/>
         </p:spPr>
         <p:txBody>
-          <a:bodyPr wrap="square" anchor="t" lIns="0" rIns="0" tIns="0" bIns="0">
+          <a:bodyPr wrap="square" lIns="0" tIns="0" rIns="0" bIns="0" anchor="t">
             <a:spAutoFit/>
           </a:bodyPr>
           <a:lstStyle/>
@@ -8013,7 +9088,7 @@
           <a:noFill/>
         </p:spPr>
         <p:txBody>
-          <a:bodyPr wrap="square" anchor="t" lIns="0" rIns="0" tIns="0" bIns="0">
+          <a:bodyPr wrap="square" lIns="0" tIns="0" rIns="0" bIns="0" anchor="t">
             <a:spAutoFit/>
           </a:bodyPr>
           <a:lstStyle/>
@@ -8048,7 +9123,7 @@
           <a:noFill/>
         </p:spPr>
         <p:txBody>
-          <a:bodyPr wrap="square" anchor="t" lIns="0" rIns="0" tIns="0" bIns="0">
+          <a:bodyPr wrap="square" lIns="0" tIns="0" rIns="0" bIns="0" anchor="t">
             <a:spAutoFit/>
           </a:bodyPr>
           <a:lstStyle/>
@@ -8107,6 +9182,7 @@
           <a:lstStyle/>
           <a:p>
             <a:pPr algn="ctr"/>
+            <a:endParaRPr/>
           </a:p>
         </p:txBody>
       </p:sp>
@@ -8127,7 +9203,7 @@
           <a:noFill/>
         </p:spPr>
         <p:txBody>
-          <a:bodyPr wrap="square" anchor="t" lIns="0" rIns="0" tIns="0" bIns="0">
+          <a:bodyPr wrap="square" lIns="0" tIns="0" rIns="0" bIns="0" anchor="t">
             <a:spAutoFit/>
           </a:bodyPr>
           <a:lstStyle/>
@@ -8178,7 +9254,7 @@
 </file>
 
 <file path=ppt/slides/slide5.xml><?xml version="1.0" encoding="utf-8"?>
-<p:sld xmlns:a="http://schemas.openxmlformats.org/drawingml/2006/main" xmlns:p="http://schemas.openxmlformats.org/presentationml/2006/main" xmlns:r="http://schemas.openxmlformats.org/officeDocument/2006/relationships">
+<p:sld xmlns:a="http://schemas.openxmlformats.org/drawingml/2006/main" xmlns:r="http://schemas.openxmlformats.org/officeDocument/2006/relationships" xmlns:p="http://schemas.openxmlformats.org/presentationml/2006/main">
   <p:cSld>
     <p:bg>
       <p:bgPr>
@@ -8194,7 +9270,14 @@
         <p:cNvGrpSpPr/>
         <p:nvPr/>
       </p:nvGrpSpPr>
-      <p:grpSpPr/>
+      <p:grpSpPr>
+        <a:xfrm>
+          <a:off x="0" y="0"/>
+          <a:ext cx="0" cy="0"/>
+          <a:chOff x="0" y="0"/>
+          <a:chExt cx="0" cy="0"/>
+        </a:xfrm>
+      </p:grpSpPr>
       <p:sp>
         <p:nvSpPr>
           <p:cNvPr id="2" name="TextBox 1"/>
@@ -8212,7 +9295,7 @@
           <a:noFill/>
         </p:spPr>
         <p:txBody>
-          <a:bodyPr wrap="square" anchor="t" lIns="0" rIns="0" tIns="0" bIns="0">
+          <a:bodyPr wrap="square" lIns="0" tIns="0" rIns="0" bIns="0" anchor="t">
             <a:spAutoFit/>
           </a:bodyPr>
           <a:lstStyle/>
@@ -8247,7 +9330,7 @@
           <a:noFill/>
         </p:spPr>
         <p:txBody>
-          <a:bodyPr wrap="square" anchor="t" lIns="0" rIns="0" tIns="0" bIns="0">
+          <a:bodyPr wrap="square" lIns="0" tIns="0" rIns="0" bIns="0" anchor="t">
             <a:spAutoFit/>
           </a:bodyPr>
           <a:lstStyle/>
@@ -8282,7 +9365,7 @@
           <a:noFill/>
         </p:spPr>
         <p:txBody>
-          <a:bodyPr wrap="square" anchor="t" lIns="0" rIns="0" tIns="0" bIns="0">
+          <a:bodyPr wrap="square" lIns="0" tIns="0" rIns="0" bIns="0" anchor="t">
             <a:spAutoFit/>
           </a:bodyPr>
           <a:lstStyle/>
@@ -8341,6 +9424,7 @@
           <a:lstStyle/>
           <a:p>
             <a:pPr algn="ctr"/>
+            <a:endParaRPr/>
           </a:p>
         </p:txBody>
       </p:sp>
@@ -8385,6 +9469,7 @@
           <a:lstStyle/>
           <a:p>
             <a:pPr algn="ctr"/>
+            <a:endParaRPr/>
           </a:p>
         </p:txBody>
       </p:sp>
@@ -8429,6 +9514,7 @@
           <a:lstStyle/>
           <a:p>
             <a:pPr algn="ctr"/>
+            <a:endParaRPr/>
           </a:p>
         </p:txBody>
       </p:sp>
@@ -8449,7 +9535,7 @@
           <a:noFill/>
         </p:spPr>
         <p:txBody>
-          <a:bodyPr wrap="square" anchor="ctr" lIns="0" rIns="0" tIns="0" bIns="0">
+          <a:bodyPr wrap="square" lIns="0" tIns="0" rIns="0" bIns="0" anchor="ctr">
             <a:spAutoFit/>
           </a:bodyPr>
           <a:lstStyle/>
@@ -8484,14 +9570,14 @@
           <a:noFill/>
         </p:spPr>
         <p:txBody>
-          <a:bodyPr wrap="square" anchor="t" lIns="0" rIns="0" tIns="0" bIns="0">
-            <a:spAutoFit/>
-          </a:bodyPr>
-          <a:lstStyle/>
-          <a:p>
-            <a:pPr algn="l"/>
-            <a:r>
-              <a:rPr sz="1600" b="1">
+          <a:bodyPr wrap="square" lIns="0" tIns="0" rIns="0" bIns="0" anchor="t">
+            <a:spAutoFit/>
+          </a:bodyPr>
+          <a:lstStyle/>
+          <a:p>
+            <a:pPr algn="l"/>
+            <a:r>
+              <a:rPr sz="1600" b="1" dirty="0">
                 <a:solidFill>
                   <a:srgbClr val="1B1D1A"/>
                 </a:solidFill>
@@ -8503,14 +9589,29 @@
           <a:p>
             <a:pPr algn="l"/>
             <a:r>
-              <a:rPr sz="1600" b="1">
+              <a:rPr sz="1600" b="1" dirty="0">
                 <a:solidFill>
                   <a:srgbClr val="1B1D1A"/>
                 </a:solidFill>
                 <a:latin typeface="Yu Gothic UI"/>
               </a:rPr>
-              <a:t>Data 分離</a:t>
-            </a:r>
+              <a:t>Data </a:t>
+            </a:r>
+            <a:r>
+              <a:rPr sz="1600" b="1" dirty="0" err="1">
+                <a:solidFill>
+                  <a:srgbClr val="1B1D1A"/>
+                </a:solidFill>
+                <a:latin typeface="Yu Gothic UI"/>
+              </a:rPr>
+              <a:t>分離</a:t>
+            </a:r>
+            <a:endParaRPr sz="1600" b="1" dirty="0">
+              <a:solidFill>
+                <a:srgbClr val="1B1D1A"/>
+              </a:solidFill>
+              <a:latin typeface="Yu Gothic UI"/>
+            </a:endParaRPr>
           </a:p>
         </p:txBody>
       </p:sp>
@@ -8531,7 +9632,7 @@
           <a:noFill/>
         </p:spPr>
         <p:txBody>
-          <a:bodyPr wrap="square" anchor="t" lIns="0" rIns="0" tIns="0" bIns="0">
+          <a:bodyPr wrap="square" lIns="0" tIns="0" rIns="0" bIns="0" anchor="t">
             <a:spAutoFit/>
           </a:bodyPr>
           <a:lstStyle/>
@@ -8561,15 +9662,12 @@
           </a:p>
           <a:p>
             <a:pPr algn="l"/>
-            <a:r>
-              <a:rPr sz="1000" b="0">
-                <a:solidFill>
-                  <a:srgbClr val="545655"/>
-                </a:solidFill>
-                <a:latin typeface="Yu Gothic UI"/>
-              </a:rPr>
-              <a:t/>
-            </a:r>
+            <a:endParaRPr sz="1000" b="0">
+              <a:solidFill>
+                <a:srgbClr val="545655"/>
+              </a:solidFill>
+              <a:latin typeface="Yu Gothic UI"/>
+            </a:endParaRPr>
           </a:p>
           <a:p>
             <a:pPr algn="l"/>
@@ -8650,6 +9748,7 @@
           <a:lstStyle/>
           <a:p>
             <a:pPr algn="ctr"/>
+            <a:endParaRPr/>
           </a:p>
         </p:txBody>
       </p:sp>
@@ -8694,6 +9793,7 @@
           <a:lstStyle/>
           <a:p>
             <a:pPr algn="ctr"/>
+            <a:endParaRPr/>
           </a:p>
         </p:txBody>
       </p:sp>
@@ -8714,7 +9814,7 @@
           <a:noFill/>
         </p:spPr>
         <p:txBody>
-          <a:bodyPr wrap="square" anchor="ctr" lIns="0" rIns="0" tIns="0" bIns="0">
+          <a:bodyPr wrap="square" lIns="0" tIns="0" rIns="0" bIns="0" anchor="ctr">
             <a:spAutoFit/>
           </a:bodyPr>
           <a:lstStyle/>
@@ -8749,7 +9849,7 @@
           <a:noFill/>
         </p:spPr>
         <p:txBody>
-          <a:bodyPr wrap="square" anchor="t" lIns="0" rIns="0" tIns="0" bIns="0">
+          <a:bodyPr wrap="square" lIns="0" tIns="0" rIns="0" bIns="0" anchor="t">
             <a:spAutoFit/>
           </a:bodyPr>
           <a:lstStyle/>
@@ -8796,7 +9896,7 @@
           <a:noFill/>
         </p:spPr>
         <p:txBody>
-          <a:bodyPr wrap="square" anchor="t" lIns="0" rIns="0" tIns="0" bIns="0">
+          <a:bodyPr wrap="square" lIns="0" tIns="0" rIns="0" bIns="0" anchor="t">
             <a:spAutoFit/>
           </a:bodyPr>
           <a:lstStyle/>
@@ -8838,15 +9938,12 @@
           </a:p>
           <a:p>
             <a:pPr algn="l"/>
-            <a:r>
-              <a:rPr sz="1000" b="0">
-                <a:solidFill>
-                  <a:srgbClr val="545655"/>
-                </a:solidFill>
-                <a:latin typeface="Yu Gothic UI"/>
-              </a:rPr>
-              <a:t/>
-            </a:r>
+            <a:endParaRPr sz="1000" b="0">
+              <a:solidFill>
+                <a:srgbClr val="545655"/>
+              </a:solidFill>
+              <a:latin typeface="Yu Gothic UI"/>
+            </a:endParaRPr>
           </a:p>
           <a:p>
             <a:pPr algn="l"/>
@@ -8927,6 +10024,7 @@
           <a:lstStyle/>
           <a:p>
             <a:pPr algn="ctr"/>
+            <a:endParaRPr/>
           </a:p>
         </p:txBody>
       </p:sp>
@@ -8971,6 +10069,7 @@
           <a:lstStyle/>
           <a:p>
             <a:pPr algn="ctr"/>
+            <a:endParaRPr/>
           </a:p>
         </p:txBody>
       </p:sp>
@@ -8991,7 +10090,7 @@
           <a:noFill/>
         </p:spPr>
         <p:txBody>
-          <a:bodyPr wrap="square" anchor="ctr" lIns="0" rIns="0" tIns="0" bIns="0">
+          <a:bodyPr wrap="square" lIns="0" tIns="0" rIns="0" bIns="0" anchor="ctr">
             <a:spAutoFit/>
           </a:bodyPr>
           <a:lstStyle/>
@@ -9026,7 +10125,7 @@
           <a:noFill/>
         </p:spPr>
         <p:txBody>
-          <a:bodyPr wrap="square" anchor="t" lIns="0" rIns="0" tIns="0" bIns="0">
+          <a:bodyPr wrap="square" lIns="0" tIns="0" rIns="0" bIns="0" anchor="t">
             <a:spAutoFit/>
           </a:bodyPr>
           <a:lstStyle/>
@@ -9073,7 +10172,7 @@
           <a:noFill/>
         </p:spPr>
         <p:txBody>
-          <a:bodyPr wrap="square" anchor="t" lIns="0" rIns="0" tIns="0" bIns="0">
+          <a:bodyPr wrap="square" lIns="0" tIns="0" rIns="0" bIns="0" anchor="t">
             <a:spAutoFit/>
           </a:bodyPr>
           <a:lstStyle/>
@@ -9115,15 +10214,12 @@
           </a:p>
           <a:p>
             <a:pPr algn="l"/>
-            <a:r>
-              <a:rPr sz="1000" b="0">
-                <a:solidFill>
-                  <a:srgbClr val="545655"/>
-                </a:solidFill>
-                <a:latin typeface="Yu Gothic UI"/>
-              </a:rPr>
-              <a:t/>
-            </a:r>
+            <a:endParaRPr sz="1000" b="0">
+              <a:solidFill>
+                <a:srgbClr val="545655"/>
+              </a:solidFill>
+              <a:latin typeface="Yu Gothic UI"/>
+            </a:endParaRPr>
           </a:p>
           <a:p>
             <a:pPr algn="l"/>
@@ -9172,7 +10268,7 @@
 </file>
 
 <file path=ppt/slides/slide6.xml><?xml version="1.0" encoding="utf-8"?>
-<p:sld xmlns:a="http://schemas.openxmlformats.org/drawingml/2006/main" xmlns:p="http://schemas.openxmlformats.org/presentationml/2006/main" xmlns:r="http://schemas.openxmlformats.org/officeDocument/2006/relationships">
+<p:sld xmlns:a="http://schemas.openxmlformats.org/drawingml/2006/main" xmlns:r="http://schemas.openxmlformats.org/officeDocument/2006/relationships" xmlns:p="http://schemas.openxmlformats.org/presentationml/2006/main">
   <p:cSld>
     <p:bg>
       <p:bgPr>
@@ -9188,7 +10284,14 @@
         <p:cNvGrpSpPr/>
         <p:nvPr/>
       </p:nvGrpSpPr>
-      <p:grpSpPr/>
+      <p:grpSpPr>
+        <a:xfrm>
+          <a:off x="0" y="0"/>
+          <a:ext cx="0" cy="0"/>
+          <a:chOff x="0" y="0"/>
+          <a:chExt cx="0" cy="0"/>
+        </a:xfrm>
+      </p:grpSpPr>
       <p:sp>
         <p:nvSpPr>
           <p:cNvPr id="2" name="TextBox 1"/>
@@ -9206,7 +10309,7 @@
           <a:noFill/>
         </p:spPr>
         <p:txBody>
-          <a:bodyPr wrap="square" anchor="t" lIns="0" rIns="0" tIns="0" bIns="0">
+          <a:bodyPr wrap="square" lIns="0" tIns="0" rIns="0" bIns="0" anchor="t">
             <a:spAutoFit/>
           </a:bodyPr>
           <a:lstStyle/>
@@ -9241,7 +10344,7 @@
           <a:noFill/>
         </p:spPr>
         <p:txBody>
-          <a:bodyPr wrap="square" anchor="t" lIns="0" rIns="0" tIns="0" bIns="0">
+          <a:bodyPr wrap="square" lIns="0" tIns="0" rIns="0" bIns="0" anchor="t">
             <a:spAutoFit/>
           </a:bodyPr>
           <a:lstStyle/>
@@ -9276,7 +10379,7 @@
           <a:noFill/>
         </p:spPr>
         <p:txBody>
-          <a:bodyPr wrap="square" anchor="t" lIns="0" rIns="0" tIns="0" bIns="0">
+          <a:bodyPr wrap="square" lIns="0" tIns="0" rIns="0" bIns="0" anchor="t">
             <a:spAutoFit/>
           </a:bodyPr>
           <a:lstStyle/>
@@ -9335,6 +10438,7 @@
           <a:lstStyle/>
           <a:p>
             <a:pPr algn="ctr"/>
+            <a:endParaRPr/>
           </a:p>
         </p:txBody>
       </p:sp>
@@ -9379,6 +10483,7 @@
           <a:lstStyle/>
           <a:p>
             <a:pPr algn="ctr"/>
+            <a:endParaRPr/>
           </a:p>
         </p:txBody>
       </p:sp>
@@ -9423,6 +10528,7 @@
           <a:lstStyle/>
           <a:p>
             <a:pPr algn="ctr"/>
+            <a:endParaRPr/>
           </a:p>
         </p:txBody>
       </p:sp>
@@ -9443,7 +10549,7 @@
           <a:noFill/>
         </p:spPr>
         <p:txBody>
-          <a:bodyPr wrap="square" anchor="t" lIns="0" rIns="0" tIns="0" bIns="0">
+          <a:bodyPr wrap="square" lIns="0" tIns="0" rIns="0" bIns="0" anchor="t">
             <a:spAutoFit/>
           </a:bodyPr>
           <a:lstStyle/>
@@ -9478,7 +10584,7 @@
           <a:noFill/>
         </p:spPr>
         <p:txBody>
-          <a:bodyPr wrap="square" anchor="t" lIns="0" rIns="0" tIns="0" bIns="0">
+          <a:bodyPr wrap="square" lIns="0" tIns="0" rIns="0" bIns="0" anchor="t">
             <a:spAutoFit/>
           </a:bodyPr>
           <a:lstStyle/>
@@ -9549,6 +10655,7 @@
           <a:lstStyle/>
           <a:p>
             <a:pPr algn="ctr"/>
+            <a:endParaRPr/>
           </a:p>
         </p:txBody>
       </p:sp>
@@ -9569,7 +10676,7 @@
           <a:noFill/>
         </p:spPr>
         <p:txBody>
-          <a:bodyPr wrap="square" anchor="t" lIns="0" rIns="0" tIns="0" bIns="0">
+          <a:bodyPr wrap="square" lIns="0" tIns="0" rIns="0" bIns="0" anchor="t">
             <a:spAutoFit/>
           </a:bodyPr>
           <a:lstStyle/>
@@ -9676,6 +10783,7 @@
           <a:lstStyle/>
           <a:p>
             <a:pPr algn="ctr"/>
+            <a:endParaRPr/>
           </a:p>
         </p:txBody>
       </p:sp>
@@ -9720,6 +10828,7 @@
           <a:lstStyle/>
           <a:p>
             <a:pPr algn="ctr"/>
+            <a:endParaRPr/>
           </a:p>
         </p:txBody>
       </p:sp>
@@ -9740,7 +10849,7 @@
           <a:noFill/>
         </p:spPr>
         <p:txBody>
-          <a:bodyPr wrap="square" anchor="t" lIns="0" rIns="0" tIns="0" bIns="0">
+          <a:bodyPr wrap="square" lIns="0" tIns="0" rIns="0" bIns="0" anchor="t">
             <a:spAutoFit/>
           </a:bodyPr>
           <a:lstStyle/>
@@ -9775,7 +10884,7 @@
           <a:noFill/>
         </p:spPr>
         <p:txBody>
-          <a:bodyPr wrap="square" anchor="t" lIns="0" rIns="0" tIns="0" bIns="0">
+          <a:bodyPr wrap="square" lIns="0" tIns="0" rIns="0" bIns="0" anchor="t">
             <a:spAutoFit/>
           </a:bodyPr>
           <a:lstStyle/>
@@ -9846,6 +10955,7 @@
           <a:lstStyle/>
           <a:p>
             <a:pPr algn="ctr"/>
+            <a:endParaRPr/>
           </a:p>
         </p:txBody>
       </p:sp>
@@ -9866,7 +10976,7 @@
           <a:noFill/>
         </p:spPr>
         <p:txBody>
-          <a:bodyPr wrap="square" anchor="t" lIns="0" rIns="0" tIns="0" bIns="0">
+          <a:bodyPr wrap="square" lIns="0" tIns="0" rIns="0" bIns="0" anchor="t">
             <a:spAutoFit/>
           </a:bodyPr>
           <a:lstStyle/>
@@ -9985,6 +11095,7 @@
           <a:lstStyle/>
           <a:p>
             <a:pPr algn="ctr"/>
+            <a:endParaRPr/>
           </a:p>
         </p:txBody>
       </p:sp>
@@ -10029,6 +11140,7 @@
           <a:lstStyle/>
           <a:p>
             <a:pPr algn="ctr"/>
+            <a:endParaRPr/>
           </a:p>
         </p:txBody>
       </p:sp>
@@ -10049,7 +11161,7 @@
           <a:noFill/>
         </p:spPr>
         <p:txBody>
-          <a:bodyPr wrap="square" anchor="t" lIns="0" rIns="0" tIns="0" bIns="0">
+          <a:bodyPr wrap="square" lIns="0" tIns="0" rIns="0" bIns="0" anchor="t">
             <a:spAutoFit/>
           </a:bodyPr>
           <a:lstStyle/>
@@ -10084,7 +11196,7 @@
           <a:noFill/>
         </p:spPr>
         <p:txBody>
-          <a:bodyPr wrap="square" anchor="t" lIns="0" rIns="0" tIns="0" bIns="0">
+          <a:bodyPr wrap="square" lIns="0" tIns="0" rIns="0" bIns="0" anchor="t">
             <a:spAutoFit/>
           </a:bodyPr>
           <a:lstStyle/>
@@ -10167,6 +11279,7 @@
           <a:lstStyle/>
           <a:p>
             <a:pPr algn="ctr"/>
+            <a:endParaRPr/>
           </a:p>
         </p:txBody>
       </p:sp>
@@ -10187,7 +11300,7 @@
           <a:noFill/>
         </p:spPr>
         <p:txBody>
-          <a:bodyPr wrap="square" anchor="t" lIns="0" rIns="0" tIns="0" bIns="0">
+          <a:bodyPr wrap="square" lIns="0" tIns="0" rIns="0" bIns="0" anchor="t">
             <a:spAutoFit/>
           </a:bodyPr>
           <a:lstStyle/>
@@ -10282,6 +11395,7 @@
           <a:lstStyle/>
           <a:p>
             <a:pPr algn="ctr"/>
+            <a:endParaRPr/>
           </a:p>
         </p:txBody>
       </p:sp>
@@ -10326,6 +11440,7 @@
           <a:lstStyle/>
           <a:p>
             <a:pPr algn="ctr"/>
+            <a:endParaRPr/>
           </a:p>
         </p:txBody>
       </p:sp>
@@ -10346,7 +11461,7 @@
           <a:noFill/>
         </p:spPr>
         <p:txBody>
-          <a:bodyPr wrap="square" anchor="t" lIns="0" rIns="0" tIns="0" bIns="0">
+          <a:bodyPr wrap="square" lIns="0" tIns="0" rIns="0" bIns="0" anchor="t">
             <a:spAutoFit/>
           </a:bodyPr>
           <a:lstStyle/>
@@ -10381,7 +11496,7 @@
           <a:noFill/>
         </p:spPr>
         <p:txBody>
-          <a:bodyPr wrap="square" anchor="t" lIns="0" rIns="0" tIns="0" bIns="0">
+          <a:bodyPr wrap="square" lIns="0" tIns="0" rIns="0" bIns="0" anchor="t">
             <a:spAutoFit/>
           </a:bodyPr>
           <a:lstStyle/>
@@ -10452,6 +11567,7 @@
           <a:lstStyle/>
           <a:p>
             <a:pPr algn="ctr"/>
+            <a:endParaRPr/>
           </a:p>
         </p:txBody>
       </p:sp>
@@ -10472,7 +11588,7 @@
           <a:noFill/>
         </p:spPr>
         <p:txBody>
-          <a:bodyPr wrap="square" anchor="t" lIns="0" rIns="0" tIns="0" bIns="0">
+          <a:bodyPr wrap="square" lIns="0" tIns="0" rIns="0" bIns="0" anchor="t">
             <a:spAutoFit/>
           </a:bodyPr>
           <a:lstStyle/>
@@ -10591,6 +11707,7 @@
           <a:lstStyle/>
           <a:p>
             <a:pPr algn="ctr"/>
+            <a:endParaRPr/>
           </a:p>
         </p:txBody>
       </p:sp>
@@ -10635,6 +11752,7 @@
           <a:lstStyle/>
           <a:p>
             <a:pPr algn="ctr"/>
+            <a:endParaRPr/>
           </a:p>
         </p:txBody>
       </p:sp>
@@ -10655,7 +11773,7 @@
           <a:noFill/>
         </p:spPr>
         <p:txBody>
-          <a:bodyPr wrap="square" anchor="t" lIns="0" rIns="0" tIns="0" bIns="0">
+          <a:bodyPr wrap="square" lIns="0" tIns="0" rIns="0" bIns="0" anchor="t">
             <a:spAutoFit/>
           </a:bodyPr>
           <a:lstStyle/>
@@ -10690,7 +11808,7 @@
           <a:noFill/>
         </p:spPr>
         <p:txBody>
-          <a:bodyPr wrap="square" anchor="t" lIns="0" rIns="0" tIns="0" bIns="0">
+          <a:bodyPr wrap="square" lIns="0" tIns="0" rIns="0" bIns="0" anchor="t">
             <a:spAutoFit/>
           </a:bodyPr>
           <a:lstStyle/>
@@ -10761,6 +11879,7 @@
           <a:lstStyle/>
           <a:p>
             <a:pPr algn="ctr"/>
+            <a:endParaRPr/>
           </a:p>
         </p:txBody>
       </p:sp>
@@ -10781,7 +11900,7 @@
           <a:noFill/>
         </p:spPr>
         <p:txBody>
-          <a:bodyPr wrap="square" anchor="t" lIns="0" rIns="0" tIns="0" bIns="0">
+          <a:bodyPr wrap="square" lIns="0" tIns="0" rIns="0" bIns="0" anchor="t">
             <a:spAutoFit/>
           </a:bodyPr>
           <a:lstStyle/>
@@ -10864,7 +11983,7 @@
           <a:noFill/>
         </p:spPr>
         <p:txBody>
-          <a:bodyPr wrap="square" anchor="t" lIns="0" rIns="0" tIns="0" bIns="0">
+          <a:bodyPr wrap="square" lIns="0" tIns="0" rIns="0" bIns="0" anchor="t">
             <a:spAutoFit/>
           </a:bodyPr>
           <a:lstStyle/>
@@ -10891,7 +12010,7 @@
 </file>
 
 <file path=ppt/slides/slide7.xml><?xml version="1.0" encoding="utf-8"?>
-<p:sld xmlns:a="http://schemas.openxmlformats.org/drawingml/2006/main" xmlns:p="http://schemas.openxmlformats.org/presentationml/2006/main" xmlns:r="http://schemas.openxmlformats.org/officeDocument/2006/relationships">
+<p:sld xmlns:a="http://schemas.openxmlformats.org/drawingml/2006/main" xmlns:r="http://schemas.openxmlformats.org/officeDocument/2006/relationships" xmlns:p="http://schemas.openxmlformats.org/presentationml/2006/main">
   <p:cSld>
     <p:bg>
       <p:bgPr>
@@ -10907,7 +12026,14 @@
         <p:cNvGrpSpPr/>
         <p:nvPr/>
       </p:nvGrpSpPr>
-      <p:grpSpPr/>
+      <p:grpSpPr>
+        <a:xfrm>
+          <a:off x="0" y="0"/>
+          <a:ext cx="0" cy="0"/>
+          <a:chOff x="0" y="0"/>
+          <a:chExt cx="0" cy="0"/>
+        </a:xfrm>
+      </p:grpSpPr>
       <p:sp>
         <p:nvSpPr>
           <p:cNvPr id="2" name="Rectangle 1"/>
@@ -10949,6 +12075,7 @@
           <a:lstStyle/>
           <a:p>
             <a:pPr algn="ctr"/>
+            <a:endParaRPr/>
           </a:p>
         </p:txBody>
       </p:sp>
@@ -10969,7 +12096,7 @@
           <a:noFill/>
         </p:spPr>
         <p:txBody>
-          <a:bodyPr wrap="square" anchor="t" lIns="0" rIns="0" tIns="0" bIns="0">
+          <a:bodyPr wrap="square" lIns="0" tIns="0" rIns="0" bIns="0" anchor="t">
             <a:spAutoFit/>
           </a:bodyPr>
           <a:lstStyle/>
@@ -11004,7 +12131,7 @@
           <a:noFill/>
         </p:spPr>
         <p:txBody>
-          <a:bodyPr wrap="square" anchor="t" lIns="0" rIns="0" tIns="0" bIns="0">
+          <a:bodyPr wrap="square" lIns="0" tIns="0" rIns="0" bIns="0" anchor="t">
             <a:spAutoFit/>
           </a:bodyPr>
           <a:lstStyle/>
@@ -11039,7 +12166,7 @@
           <a:noFill/>
         </p:spPr>
         <p:txBody>
-          <a:bodyPr wrap="square" anchor="t" lIns="0" rIns="0" tIns="0" bIns="0">
+          <a:bodyPr wrap="square" lIns="0" tIns="0" rIns="0" bIns="0" anchor="t">
             <a:spAutoFit/>
           </a:bodyPr>
           <a:lstStyle/>
@@ -11074,7 +12201,7 @@
           <a:noFill/>
         </p:spPr>
         <p:txBody>
-          <a:bodyPr wrap="square" anchor="t" lIns="0" rIns="0" tIns="0" bIns="0">
+          <a:bodyPr wrap="square" lIns="0" tIns="0" rIns="0" bIns="0" anchor="t">
             <a:spAutoFit/>
           </a:bodyPr>
           <a:lstStyle/>
@@ -11109,7 +12236,7 @@
           <a:noFill/>
         </p:spPr>
         <p:txBody>
-          <a:bodyPr wrap="square" anchor="t" lIns="0" rIns="0" tIns="0" bIns="0">
+          <a:bodyPr wrap="square" lIns="0" tIns="0" rIns="0" bIns="0" anchor="t">
             <a:spAutoFit/>
           </a:bodyPr>
           <a:lstStyle/>
@@ -11144,7 +12271,7 @@
           <a:noFill/>
         </p:spPr>
         <p:txBody>
-          <a:bodyPr wrap="square" anchor="t" lIns="0" rIns="0" tIns="0" bIns="0">
+          <a:bodyPr wrap="square" lIns="0" tIns="0" rIns="0" bIns="0" anchor="t">
             <a:spAutoFit/>
           </a:bodyPr>
           <a:lstStyle/>
@@ -11203,6 +12330,7 @@
           <a:lstStyle/>
           <a:p>
             <a:pPr algn="ctr"/>
+            <a:endParaRPr/>
           </a:p>
         </p:txBody>
       </p:sp>
@@ -11223,7 +12351,7 @@
           <a:noFill/>
         </p:spPr>
         <p:txBody>
-          <a:bodyPr wrap="square" anchor="t" lIns="0" rIns="0" tIns="0" bIns="0">
+          <a:bodyPr wrap="square" lIns="0" tIns="0" rIns="0" bIns="0" anchor="t">
             <a:spAutoFit/>
           </a:bodyPr>
           <a:lstStyle/>
@@ -11258,7 +12386,7 @@
           <a:noFill/>
         </p:spPr>
         <p:txBody>
-          <a:bodyPr wrap="square" anchor="t" lIns="0" rIns="0" tIns="0" bIns="0">
+          <a:bodyPr wrap="square" lIns="0" tIns="0" rIns="0" bIns="0" anchor="t">
             <a:spAutoFit/>
           </a:bodyPr>
           <a:lstStyle/>
@@ -11293,7 +12421,7 @@
           <a:noFill/>
         </p:spPr>
         <p:txBody>
-          <a:bodyPr wrap="square" anchor="t" lIns="0" rIns="0" tIns="0" bIns="0">
+          <a:bodyPr wrap="square" lIns="0" tIns="0" rIns="0" bIns="0" anchor="t">
             <a:spAutoFit/>
           </a:bodyPr>
           <a:lstStyle/>
@@ -11320,7 +12448,7 @@
 </file>
 
 <file path=ppt/slides/slide8.xml><?xml version="1.0" encoding="utf-8"?>
-<p:sld xmlns:a="http://schemas.openxmlformats.org/drawingml/2006/main" xmlns:p="http://schemas.openxmlformats.org/presentationml/2006/main" xmlns:r="http://schemas.openxmlformats.org/officeDocument/2006/relationships">
+<p:sld xmlns:a="http://schemas.openxmlformats.org/drawingml/2006/main" xmlns:r="http://schemas.openxmlformats.org/officeDocument/2006/relationships" xmlns:p="http://schemas.openxmlformats.org/presentationml/2006/main">
   <p:cSld>
     <p:bg>
       <p:bgPr>
@@ -11336,7 +12464,14 @@
         <p:cNvGrpSpPr/>
         <p:nvPr/>
       </p:nvGrpSpPr>
-      <p:grpSpPr/>
+      <p:grpSpPr>
+        <a:xfrm>
+          <a:off x="0" y="0"/>
+          <a:ext cx="0" cy="0"/>
+          <a:chOff x="0" y="0"/>
+          <a:chExt cx="0" cy="0"/>
+        </a:xfrm>
+      </p:grpSpPr>
       <p:sp>
         <p:nvSpPr>
           <p:cNvPr id="2" name="TextBox 1"/>
@@ -11354,7 +12489,7 @@
           <a:noFill/>
         </p:spPr>
         <p:txBody>
-          <a:bodyPr wrap="square" anchor="t" lIns="0" rIns="0" tIns="0" bIns="0">
+          <a:bodyPr wrap="square" lIns="0" tIns="0" rIns="0" bIns="0" anchor="t">
             <a:spAutoFit/>
           </a:bodyPr>
           <a:lstStyle/>
@@ -11389,7 +12524,7 @@
           <a:noFill/>
         </p:spPr>
         <p:txBody>
-          <a:bodyPr wrap="square" anchor="t" lIns="0" rIns="0" tIns="0" bIns="0">
+          <a:bodyPr wrap="square" lIns="0" tIns="0" rIns="0" bIns="0" anchor="t">
             <a:spAutoFit/>
           </a:bodyPr>
           <a:lstStyle/>
@@ -11424,7 +12559,7 @@
           <a:noFill/>
         </p:spPr>
         <p:txBody>
-          <a:bodyPr wrap="square" anchor="t" lIns="0" rIns="0" tIns="0" bIns="0">
+          <a:bodyPr wrap="square" lIns="0" tIns="0" rIns="0" bIns="0" anchor="t">
             <a:spAutoFit/>
           </a:bodyPr>
           <a:lstStyle/>
@@ -11483,6 +12618,7 @@
           <a:lstStyle/>
           <a:p>
             <a:pPr algn="ctr"/>
+            <a:endParaRPr/>
           </a:p>
         </p:txBody>
       </p:sp>
@@ -11527,6 +12663,7 @@
           <a:lstStyle/>
           <a:p>
             <a:pPr algn="ctr"/>
+            <a:endParaRPr/>
           </a:p>
         </p:txBody>
       </p:sp>
@@ -11547,7 +12684,7 @@
           <a:noFill/>
         </p:spPr>
         <p:txBody>
-          <a:bodyPr wrap="square" anchor="t" lIns="0" rIns="0" tIns="0" bIns="0">
+          <a:bodyPr wrap="square" lIns="0" tIns="0" rIns="0" bIns="0" anchor="t">
             <a:spAutoFit/>
           </a:bodyPr>
           <a:lstStyle/>
@@ -11606,6 +12743,7 @@
           <a:lstStyle/>
           <a:p>
             <a:pPr algn="ctr"/>
+            <a:endParaRPr/>
           </a:p>
         </p:txBody>
       </p:sp>
@@ -11626,7 +12764,7 @@
           <a:noFill/>
         </p:spPr>
         <p:txBody>
-          <a:bodyPr wrap="square" anchor="t" lIns="0" rIns="0" tIns="0" bIns="0">
+          <a:bodyPr wrap="square" lIns="0" tIns="0" rIns="0" bIns="0" anchor="t">
             <a:spAutoFit/>
           </a:bodyPr>
           <a:lstStyle/>
@@ -11661,7 +12799,7 @@
           <a:noFill/>
         </p:spPr>
         <p:txBody>
-          <a:bodyPr wrap="square" anchor="t" lIns="0" rIns="0" tIns="0" bIns="0">
+          <a:bodyPr wrap="square" lIns="0" tIns="0" rIns="0" bIns="0" anchor="t">
             <a:spAutoFit/>
           </a:bodyPr>
           <a:lstStyle/>
@@ -11696,7 +12834,7 @@
           <a:noFill/>
         </p:spPr>
         <p:txBody>
-          <a:bodyPr wrap="square" anchor="t" lIns="0" rIns="0" tIns="0" bIns="0">
+          <a:bodyPr wrap="square" lIns="0" tIns="0" rIns="0" bIns="0" anchor="t">
             <a:spAutoFit/>
           </a:bodyPr>
           <a:lstStyle/>
@@ -11731,7 +12869,7 @@
           <a:noFill/>
         </p:spPr>
         <p:txBody>
-          <a:bodyPr wrap="square" anchor="t" lIns="0" rIns="0" tIns="0" bIns="0">
+          <a:bodyPr wrap="square" lIns="0" tIns="0" rIns="0" bIns="0" anchor="t">
             <a:spAutoFit/>
           </a:bodyPr>
           <a:lstStyle/>
@@ -11766,7 +12904,7 @@
           <a:noFill/>
         </p:spPr>
         <p:txBody>
-          <a:bodyPr wrap="square" anchor="t" lIns="0" rIns="0" tIns="0" bIns="0">
+          <a:bodyPr wrap="square" lIns="0" tIns="0" rIns="0" bIns="0" anchor="t">
             <a:spAutoFit/>
           </a:bodyPr>
           <a:lstStyle/>
@@ -11801,7 +12939,7 @@
           <a:noFill/>
         </p:spPr>
         <p:txBody>
-          <a:bodyPr wrap="square" anchor="t" lIns="0" rIns="0" tIns="0" bIns="0">
+          <a:bodyPr wrap="square" lIns="0" tIns="0" rIns="0" bIns="0" anchor="t">
             <a:spAutoFit/>
           </a:bodyPr>
           <a:lstStyle/>
@@ -11860,6 +12998,7 @@
           <a:lstStyle/>
           <a:p>
             <a:pPr algn="ctr"/>
+            <a:endParaRPr/>
           </a:p>
         </p:txBody>
       </p:sp>
@@ -11880,7 +13019,7 @@
           <a:noFill/>
         </p:spPr>
         <p:txBody>
-          <a:bodyPr wrap="square" anchor="t" lIns="0" rIns="0" tIns="0" bIns="0">
+          <a:bodyPr wrap="square" lIns="0" tIns="0" rIns="0" bIns="0" anchor="t">
             <a:spAutoFit/>
           </a:bodyPr>
           <a:lstStyle/>
@@ -11939,6 +13078,7 @@
           <a:lstStyle/>
           <a:p>
             <a:pPr algn="ctr"/>
+            <a:endParaRPr/>
           </a:p>
         </p:txBody>
       </p:sp>
@@ -11959,7 +13099,7 @@
           <a:noFill/>
         </p:spPr>
         <p:txBody>
-          <a:bodyPr wrap="square" anchor="t" lIns="0" rIns="0" tIns="0" bIns="0">
+          <a:bodyPr wrap="square" lIns="0" tIns="0" rIns="0" bIns="0" anchor="t">
             <a:spAutoFit/>
           </a:bodyPr>
           <a:lstStyle/>
@@ -11994,7 +13134,7 @@
           <a:noFill/>
         </p:spPr>
         <p:txBody>
-          <a:bodyPr wrap="square" anchor="t" lIns="0" rIns="0" tIns="0" bIns="0">
+          <a:bodyPr wrap="square" lIns="0" tIns="0" rIns="0" bIns="0" anchor="t">
             <a:spAutoFit/>
           </a:bodyPr>
           <a:lstStyle/>
@@ -12029,7 +13169,7 @@
           <a:noFill/>
         </p:spPr>
         <p:txBody>
-          <a:bodyPr wrap="square" anchor="t" lIns="0" rIns="0" tIns="0" bIns="0">
+          <a:bodyPr wrap="square" lIns="0" tIns="0" rIns="0" bIns="0" anchor="t">
             <a:spAutoFit/>
           </a:bodyPr>
           <a:lstStyle/>
@@ -12064,7 +13204,7 @@
           <a:noFill/>
         </p:spPr>
         <p:txBody>
-          <a:bodyPr wrap="square" anchor="t" lIns="0" rIns="0" tIns="0" bIns="0">
+          <a:bodyPr wrap="square" lIns="0" tIns="0" rIns="0" bIns="0" anchor="t">
             <a:spAutoFit/>
           </a:bodyPr>
           <a:lstStyle/>
@@ -12099,7 +13239,7 @@
           <a:noFill/>
         </p:spPr>
         <p:txBody>
-          <a:bodyPr wrap="square" anchor="t" lIns="0" rIns="0" tIns="0" bIns="0">
+          <a:bodyPr wrap="square" lIns="0" tIns="0" rIns="0" bIns="0" anchor="t">
             <a:spAutoFit/>
           </a:bodyPr>
           <a:lstStyle/>
@@ -12134,7 +13274,7 @@
           <a:noFill/>
         </p:spPr>
         <p:txBody>
-          <a:bodyPr wrap="square" anchor="t" lIns="0" rIns="0" tIns="0" bIns="0">
+          <a:bodyPr wrap="square" lIns="0" tIns="0" rIns="0" bIns="0" anchor="t">
             <a:spAutoFit/>
           </a:bodyPr>
           <a:lstStyle/>
@@ -12169,7 +13309,7 @@
           <a:noFill/>
         </p:spPr>
         <p:txBody>
-          <a:bodyPr wrap="square" anchor="t" lIns="0" rIns="0" tIns="0" bIns="0">
+          <a:bodyPr wrap="square" lIns="0" tIns="0" rIns="0" bIns="0" anchor="t">
             <a:spAutoFit/>
           </a:bodyPr>
           <a:lstStyle/>
@@ -12196,7 +13336,7 @@
 </file>
 
 <file path=ppt/slides/slide9.xml><?xml version="1.0" encoding="utf-8"?>
-<p:sld xmlns:a="http://schemas.openxmlformats.org/drawingml/2006/main" xmlns:p="http://schemas.openxmlformats.org/presentationml/2006/main" xmlns:r="http://schemas.openxmlformats.org/officeDocument/2006/relationships">
+<p:sld xmlns:a="http://schemas.openxmlformats.org/drawingml/2006/main" xmlns:r="http://schemas.openxmlformats.org/officeDocument/2006/relationships" xmlns:p="http://schemas.openxmlformats.org/presentationml/2006/main">
   <p:cSld>
     <p:bg>
       <p:bgPr>
@@ -12212,7 +13352,14 @@
         <p:cNvGrpSpPr/>
         <p:nvPr/>
       </p:nvGrpSpPr>
-      <p:grpSpPr/>
+      <p:grpSpPr>
+        <a:xfrm>
+          <a:off x="0" y="0"/>
+          <a:ext cx="0" cy="0"/>
+          <a:chOff x="0" y="0"/>
+          <a:chExt cx="0" cy="0"/>
+        </a:xfrm>
+      </p:grpSpPr>
       <p:sp>
         <p:nvSpPr>
           <p:cNvPr id="2" name="TextBox 1"/>
@@ -12230,7 +13377,7 @@
           <a:noFill/>
         </p:spPr>
         <p:txBody>
-          <a:bodyPr wrap="square" anchor="t" lIns="0" rIns="0" tIns="0" bIns="0">
+          <a:bodyPr wrap="square" lIns="0" tIns="0" rIns="0" bIns="0" anchor="t">
             <a:spAutoFit/>
           </a:bodyPr>
           <a:lstStyle/>
@@ -12265,7 +13412,7 @@
           <a:noFill/>
         </p:spPr>
         <p:txBody>
-          <a:bodyPr wrap="square" anchor="t" lIns="0" rIns="0" tIns="0" bIns="0">
+          <a:bodyPr wrap="square" lIns="0" tIns="0" rIns="0" bIns="0" anchor="t">
             <a:spAutoFit/>
           </a:bodyPr>
           <a:lstStyle/>
@@ -12300,7 +13447,7 @@
           <a:noFill/>
         </p:spPr>
         <p:txBody>
-          <a:bodyPr wrap="square" anchor="t" lIns="0" rIns="0" tIns="0" bIns="0">
+          <a:bodyPr wrap="square" lIns="0" tIns="0" rIns="0" bIns="0" anchor="t">
             <a:spAutoFit/>
           </a:bodyPr>
           <a:lstStyle/>
@@ -12359,6 +13506,7 @@
           <a:lstStyle/>
           <a:p>
             <a:pPr algn="ctr"/>
+            <a:endParaRPr/>
           </a:p>
         </p:txBody>
       </p:sp>
@@ -12403,6 +13551,7 @@
           <a:lstStyle/>
           <a:p>
             <a:pPr algn="ctr"/>
+            <a:endParaRPr/>
           </a:p>
         </p:txBody>
       </p:sp>
@@ -12447,6 +13596,7 @@
           <a:lstStyle/>
           <a:p>
             <a:pPr algn="ctr"/>
+            <a:endParaRPr/>
           </a:p>
         </p:txBody>
       </p:sp>
@@ -12467,7 +13617,7 @@
           <a:noFill/>
         </p:spPr>
         <p:txBody>
-          <a:bodyPr wrap="square" anchor="t" lIns="0" rIns="0" tIns="0" bIns="0">
+          <a:bodyPr wrap="square" lIns="0" tIns="0" rIns="0" bIns="0" anchor="t">
             <a:spAutoFit/>
           </a:bodyPr>
           <a:lstStyle/>
@@ -12502,7 +13652,7 @@
           <a:noFill/>
         </p:spPr>
         <p:txBody>
-          <a:bodyPr wrap="square" anchor="t" lIns="0" rIns="0" tIns="0" bIns="0">
+          <a:bodyPr wrap="square" lIns="0" tIns="0" rIns="0" bIns="0" anchor="t">
             <a:spAutoFit/>
           </a:bodyPr>
           <a:lstStyle/>
@@ -12537,7 +13687,7 @@
           <a:noFill/>
         </p:spPr>
         <p:txBody>
-          <a:bodyPr wrap="square" anchor="t" lIns="0" rIns="0" tIns="0" bIns="0">
+          <a:bodyPr wrap="square" lIns="0" tIns="0" rIns="0" bIns="0" anchor="t">
             <a:spAutoFit/>
           </a:bodyPr>
           <a:lstStyle/>
@@ -12596,6 +13746,7 @@
           <a:lstStyle/>
           <a:p>
             <a:pPr algn="ctr"/>
+            <a:endParaRPr/>
           </a:p>
         </p:txBody>
       </p:sp>
@@ -12616,7 +13767,7 @@
           <a:noFill/>
         </p:spPr>
         <p:txBody>
-          <a:bodyPr wrap="square" anchor="t" lIns="0" rIns="0" tIns="0" bIns="0">
+          <a:bodyPr wrap="square" lIns="0" tIns="0" rIns="0" bIns="0" anchor="t">
             <a:spAutoFit/>
           </a:bodyPr>
           <a:lstStyle/>
@@ -12670,15 +13821,12 @@
           </a:p>
           <a:p>
             <a:pPr algn="l"/>
-            <a:r>
-              <a:rPr sz="1100" b="0">
-                <a:solidFill>
-                  <a:srgbClr val="545655"/>
-                </a:solidFill>
-                <a:latin typeface="Yu Gothic UI"/>
-              </a:rPr>
-              <a:t/>
-            </a:r>
+            <a:endParaRPr sz="1100" b="0">
+              <a:solidFill>
+                <a:srgbClr val="545655"/>
+              </a:solidFill>
+              <a:latin typeface="Yu Gothic UI"/>
+            </a:endParaRPr>
           </a:p>
           <a:p>
             <a:pPr algn="l"/>
@@ -12747,6 +13895,7 @@
           <a:lstStyle/>
           <a:p>
             <a:pPr algn="ctr"/>
+            <a:endParaRPr/>
           </a:p>
         </p:txBody>
       </p:sp>
@@ -12791,6 +13940,7 @@
           <a:lstStyle/>
           <a:p>
             <a:pPr algn="ctr"/>
+            <a:endParaRPr/>
           </a:p>
         </p:txBody>
       </p:sp>
@@ -12811,7 +13961,7 @@
           <a:noFill/>
         </p:spPr>
         <p:txBody>
-          <a:bodyPr wrap="square" anchor="t" lIns="0" rIns="0" tIns="0" bIns="0">
+          <a:bodyPr wrap="square" lIns="0" tIns="0" rIns="0" bIns="0" anchor="t">
             <a:spAutoFit/>
           </a:bodyPr>
           <a:lstStyle/>
@@ -12846,7 +13996,7 @@
           <a:noFill/>
         </p:spPr>
         <p:txBody>
-          <a:bodyPr wrap="square" anchor="t" lIns="0" rIns="0" tIns="0" bIns="0">
+          <a:bodyPr wrap="square" lIns="0" tIns="0" rIns="0" bIns="0" anchor="t">
             <a:spAutoFit/>
           </a:bodyPr>
           <a:lstStyle/>
@@ -12881,7 +14031,7 @@
           <a:noFill/>
         </p:spPr>
         <p:txBody>
-          <a:bodyPr wrap="square" anchor="t" lIns="0" rIns="0" tIns="0" bIns="0">
+          <a:bodyPr wrap="square" lIns="0" tIns="0" rIns="0" bIns="0" anchor="t">
             <a:spAutoFit/>
           </a:bodyPr>
           <a:lstStyle/>
@@ -12940,6 +14090,7 @@
           <a:lstStyle/>
           <a:p>
             <a:pPr algn="ctr"/>
+            <a:endParaRPr/>
           </a:p>
         </p:txBody>
       </p:sp>
@@ -12960,7 +14111,7 @@
           <a:noFill/>
         </p:spPr>
         <p:txBody>
-          <a:bodyPr wrap="square" anchor="t" lIns="0" rIns="0" tIns="0" bIns="0">
+          <a:bodyPr wrap="square" lIns="0" tIns="0" rIns="0" bIns="0" anchor="t">
             <a:spAutoFit/>
           </a:bodyPr>
           <a:lstStyle/>
@@ -13014,15 +14165,12 @@
           </a:p>
           <a:p>
             <a:pPr algn="l"/>
-            <a:r>
-              <a:rPr sz="1100" b="0">
-                <a:solidFill>
-                  <a:srgbClr val="545655"/>
-                </a:solidFill>
-                <a:latin typeface="Yu Gothic UI"/>
-              </a:rPr>
-              <a:t/>
-            </a:r>
+            <a:endParaRPr sz="1100" b="0">
+              <a:solidFill>
+                <a:srgbClr val="545655"/>
+              </a:solidFill>
+              <a:latin typeface="Yu Gothic UI"/>
+            </a:endParaRPr>
           </a:p>
           <a:p>
             <a:pPr algn="l"/>
@@ -13091,6 +14239,7 @@
           <a:lstStyle/>
           <a:p>
             <a:pPr algn="ctr"/>
+            <a:endParaRPr/>
           </a:p>
         </p:txBody>
       </p:sp>
@@ -13135,6 +14284,7 @@
           <a:lstStyle/>
           <a:p>
             <a:pPr algn="ctr"/>
+            <a:endParaRPr/>
           </a:p>
         </p:txBody>
       </p:sp>
@@ -13155,7 +14305,7 @@
           <a:noFill/>
         </p:spPr>
         <p:txBody>
-          <a:bodyPr wrap="square" anchor="t" lIns="0" rIns="0" tIns="0" bIns="0">
+          <a:bodyPr wrap="square" lIns="0" tIns="0" rIns="0" bIns="0" anchor="t">
             <a:spAutoFit/>
           </a:bodyPr>
           <a:lstStyle/>
@@ -13190,7 +14340,7 @@
           <a:noFill/>
         </p:spPr>
         <p:txBody>
-          <a:bodyPr wrap="square" anchor="t" lIns="0" rIns="0" tIns="0" bIns="0">
+          <a:bodyPr wrap="square" lIns="0" tIns="0" rIns="0" bIns="0" anchor="t">
             <a:spAutoFit/>
           </a:bodyPr>
           <a:lstStyle/>
@@ -13225,7 +14375,7 @@
           <a:noFill/>
         </p:spPr>
         <p:txBody>
-          <a:bodyPr wrap="square" anchor="t" lIns="0" rIns="0" tIns="0" bIns="0">
+          <a:bodyPr wrap="square" lIns="0" tIns="0" rIns="0" bIns="0" anchor="t">
             <a:spAutoFit/>
           </a:bodyPr>
           <a:lstStyle/>
@@ -13284,6 +14434,7 @@
           <a:lstStyle/>
           <a:p>
             <a:pPr algn="ctr"/>
+            <a:endParaRPr/>
           </a:p>
         </p:txBody>
       </p:sp>
@@ -13304,7 +14455,7 @@
           <a:noFill/>
         </p:spPr>
         <p:txBody>
-          <a:bodyPr wrap="square" anchor="t" lIns="0" rIns="0" tIns="0" bIns="0">
+          <a:bodyPr wrap="square" lIns="0" tIns="0" rIns="0" bIns="0" anchor="t">
             <a:spAutoFit/>
           </a:bodyPr>
           <a:lstStyle/>
@@ -13358,15 +14509,12 @@
           </a:p>
           <a:p>
             <a:pPr algn="l"/>
-            <a:r>
-              <a:rPr sz="1100" b="0">
-                <a:solidFill>
-                  <a:srgbClr val="545655"/>
-                </a:solidFill>
-                <a:latin typeface="Yu Gothic UI"/>
-              </a:rPr>
-              <a:t/>
-            </a:r>
+            <a:endParaRPr sz="1100" b="0">
+              <a:solidFill>
+                <a:srgbClr val="545655"/>
+              </a:solidFill>
+              <a:latin typeface="Yu Gothic UI"/>
+            </a:endParaRPr>
           </a:p>
           <a:p>
             <a:pPr algn="l"/>
@@ -13435,6 +14583,7 @@
           <a:lstStyle/>
           <a:p>
             <a:pPr algn="ctr"/>
+            <a:endParaRPr/>
           </a:p>
         </p:txBody>
       </p:sp>
@@ -13479,6 +14628,7 @@
           <a:lstStyle/>
           <a:p>
             <a:pPr algn="ctr"/>
+            <a:endParaRPr/>
           </a:p>
         </p:txBody>
       </p:sp>
@@ -13499,7 +14649,7 @@
           <a:noFill/>
         </p:spPr>
         <p:txBody>
-          <a:bodyPr wrap="square" anchor="t" lIns="0" rIns="0" tIns="0" bIns="0">
+          <a:bodyPr wrap="square" lIns="0" tIns="0" rIns="0" bIns="0" anchor="t">
             <a:spAutoFit/>
           </a:bodyPr>
           <a:lstStyle/>
@@ -13843,4 +14993,319 @@
   </a:objectDefaults>
   <a:extraClrSchemeLst/>
 </a:theme>
+</file>
+
+<file path=ppt/theme/theme2.xml><?xml version="1.0" encoding="utf-8"?>
+<a:theme xmlns:a="http://schemas.openxmlformats.org/drawingml/2006/main" name="Office テーマ">
+  <a:themeElements>
+    <a:clrScheme name="Office">
+      <a:dk1>
+        <a:sysClr val="windowText" lastClr="000000"/>
+      </a:dk1>
+      <a:lt1>
+        <a:sysClr val="window" lastClr="FFFFFF"/>
+      </a:lt1>
+      <a:dk2>
+        <a:srgbClr val="0E2841"/>
+      </a:dk2>
+      <a:lt2>
+        <a:srgbClr val="E8E8E8"/>
+      </a:lt2>
+      <a:accent1>
+        <a:srgbClr val="156082"/>
+      </a:accent1>
+      <a:accent2>
+        <a:srgbClr val="E97132"/>
+      </a:accent2>
+      <a:accent3>
+        <a:srgbClr val="196B24"/>
+      </a:accent3>
+      <a:accent4>
+        <a:srgbClr val="0F9ED5"/>
+      </a:accent4>
+      <a:accent5>
+        <a:srgbClr val="A02B93"/>
+      </a:accent5>
+      <a:accent6>
+        <a:srgbClr val="4EA72E"/>
+      </a:accent6>
+      <a:hlink>
+        <a:srgbClr val="467886"/>
+      </a:hlink>
+      <a:folHlink>
+        <a:srgbClr val="96607D"/>
+      </a:folHlink>
+    </a:clrScheme>
+    <a:fontScheme name="Office">
+      <a:majorFont>
+        <a:latin typeface="游ゴシック Light" panose="02110004020202020204"/>
+        <a:ea typeface=""/>
+        <a:cs typeface=""/>
+        <a:font script="Jpan" typeface="游ゴシック Light"/>
+        <a:font script="Hang" typeface="맑은 고딕"/>
+        <a:font script="Hans" typeface="等线 Light"/>
+        <a:font script="Hant" typeface="新細明體"/>
+        <a:font script="Arab" typeface="Times New Roman"/>
+        <a:font script="Hebr" typeface="Times New Roman"/>
+        <a:font script="Thai" typeface="Angsana New"/>
+        <a:font script="Ethi" typeface="Nyala"/>
+        <a:font script="Beng" typeface="Vrinda"/>
+        <a:font script="Gujr" typeface="Shruti"/>
+        <a:font script="Khmr" typeface="MoolBoran"/>
+        <a:font script="Knda" typeface="Tunga"/>
+        <a:font script="Guru" typeface="Raavi"/>
+        <a:font script="Cans" typeface="Euphemia"/>
+        <a:font script="Cher" typeface="Plantagenet Cherokee"/>
+        <a:font script="Yiii" typeface="Microsoft Yi Baiti"/>
+        <a:font script="Tibt" typeface="Microsoft Himalaya"/>
+        <a:font script="Thaa" typeface="MV Boli"/>
+        <a:font script="Deva" typeface="Mangal"/>
+        <a:font script="Telu" typeface="Gautami"/>
+        <a:font script="Taml" typeface="Latha"/>
+        <a:font script="Syrc" typeface="Estrangelo Edessa"/>
+        <a:font script="Orya" typeface="Kalinga"/>
+        <a:font script="Mlym" typeface="Kartika"/>
+        <a:font script="Laoo" typeface="DokChampa"/>
+        <a:font script="Sinh" typeface="Iskoola Pota"/>
+        <a:font script="Mong" typeface="Mongolian Baiti"/>
+        <a:font script="Viet" typeface="Times New Roman"/>
+        <a:font script="Uigh" typeface="Microsoft Uighur"/>
+        <a:font script="Geor" typeface="Sylfaen"/>
+        <a:font script="Armn" typeface="Arial"/>
+        <a:font script="Bugi" typeface="Leelawadee UI"/>
+        <a:font script="Bopo" typeface="Microsoft JhengHei"/>
+        <a:font script="Java" typeface="Javanese Text"/>
+        <a:font script="Lisu" typeface="Segoe UI"/>
+        <a:font script="Mymr" typeface="Myanmar Text"/>
+        <a:font script="Nkoo" typeface="Ebrima"/>
+        <a:font script="Olck" typeface="Nirmala UI"/>
+        <a:font script="Osma" typeface="Ebrima"/>
+        <a:font script="Phag" typeface="Phagspa"/>
+        <a:font script="Syrn" typeface="Estrangelo Edessa"/>
+        <a:font script="Syrj" typeface="Estrangelo Edessa"/>
+        <a:font script="Syre" typeface="Estrangelo Edessa"/>
+        <a:font script="Sora" typeface="Nirmala UI"/>
+        <a:font script="Tale" typeface="Microsoft Tai Le"/>
+        <a:font script="Talu" typeface="Microsoft New Tai Lue"/>
+        <a:font script="Tfng" typeface="Ebrima"/>
+      </a:majorFont>
+      <a:minorFont>
+        <a:latin typeface="游ゴシック" panose="02110004020202020204"/>
+        <a:ea typeface=""/>
+        <a:cs typeface=""/>
+        <a:font script="Jpan" typeface="游ゴシック"/>
+        <a:font script="Hang" typeface="맑은 고딕"/>
+        <a:font script="Hans" typeface="等线"/>
+        <a:font script="Hant" typeface="新細明體"/>
+        <a:font script="Arab" typeface="Arial"/>
+        <a:font script="Hebr" typeface="Arial"/>
+        <a:font script="Thai" typeface="Cordia New"/>
+        <a:font script="Ethi" typeface="Nyala"/>
+        <a:font script="Beng" typeface="Vrinda"/>
+        <a:font script="Gujr" typeface="Shruti"/>
+        <a:font script="Khmr" typeface="DaunPenh"/>
+        <a:font script="Knda" typeface="Tunga"/>
+        <a:font script="Guru" typeface="Raavi"/>
+        <a:font script="Cans" typeface="Euphemia"/>
+        <a:font script="Cher" typeface="Plantagenet Cherokee"/>
+        <a:font script="Yiii" typeface="Microsoft Yi Baiti"/>
+        <a:font script="Tibt" typeface="Microsoft Himalaya"/>
+        <a:font script="Thaa" typeface="MV Boli"/>
+        <a:font script="Deva" typeface="Mangal"/>
+        <a:font script="Telu" typeface="Gautami"/>
+        <a:font script="Taml" typeface="Latha"/>
+        <a:font script="Syrc" typeface="Estrangelo Edessa"/>
+        <a:font script="Orya" typeface="Kalinga"/>
+        <a:font script="Mlym" typeface="Kartika"/>
+        <a:font script="Laoo" typeface="DokChampa"/>
+        <a:font script="Sinh" typeface="Iskoola Pota"/>
+        <a:font script="Mong" typeface="Mongolian Baiti"/>
+        <a:font script="Viet" typeface="Arial"/>
+        <a:font script="Uigh" typeface="Microsoft Uighur"/>
+        <a:font script="Geor" typeface="Sylfaen"/>
+        <a:font script="Armn" typeface="Arial"/>
+        <a:font script="Bugi" typeface="Leelawadee UI"/>
+        <a:font script="Bopo" typeface="Microsoft JhengHei"/>
+        <a:font script="Java" typeface="Javanese Text"/>
+        <a:font script="Lisu" typeface="Segoe UI"/>
+        <a:font script="Mymr" typeface="Myanmar Text"/>
+        <a:font script="Nkoo" typeface="Ebrima"/>
+        <a:font script="Olck" typeface="Nirmala UI"/>
+        <a:font script="Osma" typeface="Ebrima"/>
+        <a:font script="Phag" typeface="Phagspa"/>
+        <a:font script="Syrn" typeface="Estrangelo Edessa"/>
+        <a:font script="Syrj" typeface="Estrangelo Edessa"/>
+        <a:font script="Syre" typeface="Estrangelo Edessa"/>
+        <a:font script="Sora" typeface="Nirmala UI"/>
+        <a:font script="Tale" typeface="Microsoft Tai Le"/>
+        <a:font script="Talu" typeface="Microsoft New Tai Lue"/>
+        <a:font script="Tfng" typeface="Ebrima"/>
+      </a:minorFont>
+    </a:fontScheme>
+    <a:fmtScheme name="Office">
+      <a:fillStyleLst>
+        <a:solidFill>
+          <a:schemeClr val="phClr"/>
+        </a:solidFill>
+        <a:gradFill rotWithShape="1">
+          <a:gsLst>
+            <a:gs pos="0">
+              <a:schemeClr val="phClr">
+                <a:lumMod val="110000"/>
+                <a:satMod val="105000"/>
+                <a:tint val="67000"/>
+              </a:schemeClr>
+            </a:gs>
+            <a:gs pos="50000">
+              <a:schemeClr val="phClr">
+                <a:lumMod val="105000"/>
+                <a:satMod val="103000"/>
+                <a:tint val="73000"/>
+              </a:schemeClr>
+            </a:gs>
+            <a:gs pos="100000">
+              <a:schemeClr val="phClr">
+                <a:lumMod val="105000"/>
+                <a:satMod val="109000"/>
+                <a:tint val="81000"/>
+              </a:schemeClr>
+            </a:gs>
+          </a:gsLst>
+          <a:lin ang="5400000" scaled="0"/>
+        </a:gradFill>
+        <a:gradFill rotWithShape="1">
+          <a:gsLst>
+            <a:gs pos="0">
+              <a:schemeClr val="phClr">
+                <a:satMod val="103000"/>
+                <a:lumMod val="102000"/>
+                <a:tint val="94000"/>
+              </a:schemeClr>
+            </a:gs>
+            <a:gs pos="50000">
+              <a:schemeClr val="phClr">
+                <a:satMod val="110000"/>
+                <a:lumMod val="100000"/>
+                <a:shade val="100000"/>
+              </a:schemeClr>
+            </a:gs>
+            <a:gs pos="100000">
+              <a:schemeClr val="phClr">
+                <a:lumMod val="99000"/>
+                <a:satMod val="120000"/>
+                <a:shade val="78000"/>
+              </a:schemeClr>
+            </a:gs>
+          </a:gsLst>
+          <a:lin ang="5400000" scaled="0"/>
+        </a:gradFill>
+      </a:fillStyleLst>
+      <a:lnStyleLst>
+        <a:ln w="12700" cap="flat" cmpd="sng" algn="ctr">
+          <a:solidFill>
+            <a:schemeClr val="phClr"/>
+          </a:solidFill>
+          <a:prstDash val="solid"/>
+          <a:miter lim="800000"/>
+        </a:ln>
+        <a:ln w="19050" cap="flat" cmpd="sng" algn="ctr">
+          <a:solidFill>
+            <a:schemeClr val="phClr"/>
+          </a:solidFill>
+          <a:prstDash val="solid"/>
+          <a:miter lim="800000"/>
+        </a:ln>
+        <a:ln w="25400" cap="flat" cmpd="sng" algn="ctr">
+          <a:solidFill>
+            <a:schemeClr val="phClr"/>
+          </a:solidFill>
+          <a:prstDash val="solid"/>
+          <a:miter lim="800000"/>
+        </a:ln>
+      </a:lnStyleLst>
+      <a:effectStyleLst>
+        <a:effectStyle>
+          <a:effectLst/>
+        </a:effectStyle>
+        <a:effectStyle>
+          <a:effectLst/>
+        </a:effectStyle>
+        <a:effectStyle>
+          <a:effectLst>
+            <a:outerShdw blurRad="57150" dist="19050" dir="5400000" algn="ctr" rotWithShape="0">
+              <a:srgbClr val="000000">
+                <a:alpha val="63000"/>
+              </a:srgbClr>
+            </a:outerShdw>
+          </a:effectLst>
+        </a:effectStyle>
+      </a:effectStyleLst>
+      <a:bgFillStyleLst>
+        <a:solidFill>
+          <a:schemeClr val="phClr"/>
+        </a:solidFill>
+        <a:solidFill>
+          <a:schemeClr val="phClr">
+            <a:tint val="95000"/>
+            <a:satMod val="170000"/>
+          </a:schemeClr>
+        </a:solidFill>
+        <a:gradFill rotWithShape="1">
+          <a:gsLst>
+            <a:gs pos="0">
+              <a:schemeClr val="phClr">
+                <a:tint val="93000"/>
+                <a:satMod val="150000"/>
+                <a:shade val="98000"/>
+                <a:lumMod val="102000"/>
+              </a:schemeClr>
+            </a:gs>
+            <a:gs pos="50000">
+              <a:schemeClr val="phClr">
+                <a:tint val="98000"/>
+                <a:satMod val="130000"/>
+                <a:shade val="90000"/>
+                <a:lumMod val="103000"/>
+              </a:schemeClr>
+            </a:gs>
+            <a:gs pos="100000">
+              <a:schemeClr val="phClr">
+                <a:shade val="63000"/>
+                <a:satMod val="120000"/>
+              </a:schemeClr>
+            </a:gs>
+          </a:gsLst>
+          <a:lin ang="5400000" scaled="0"/>
+        </a:gradFill>
+      </a:bgFillStyleLst>
+    </a:fmtScheme>
+  </a:themeElements>
+  <a:objectDefaults>
+    <a:lnDef>
+      <a:spPr/>
+      <a:bodyPr/>
+      <a:lstStyle/>
+      <a:style>
+        <a:lnRef idx="2">
+          <a:schemeClr val="accent1"/>
+        </a:lnRef>
+        <a:fillRef idx="0">
+          <a:schemeClr val="accent1"/>
+        </a:fillRef>
+        <a:effectRef idx="1">
+          <a:schemeClr val="accent1"/>
+        </a:effectRef>
+        <a:fontRef idx="minor">
+          <a:schemeClr val="tx1"/>
+        </a:fontRef>
+      </a:style>
+    </a:lnDef>
+  </a:objectDefaults>
+  <a:extraClrSchemeLst/>
+  <a:extLst>
+    <a:ext uri="{05A4C25C-085E-4340-85A3-A5531E510DB2}">
+      <thm15:themeFamily xmlns:thm15="http://schemas.microsoft.com/office/thememl/2012/main" name="Office Theme" id="{2E142A2C-CD16-42D6-873A-C26D2A0506FA}" vid="{1BDDFF52-6CD6-40A5-AB3C-68EB2F1E4D0A}"/>
+    </a:ext>
+  </a:extLst>
+</a:theme>
 </file>